--- a/content/pfp-runners-part2/adobe-express/pfp-runners-part2_express.pptx
+++ b/content/pfp-runners-part2/adobe-express/pfp-runners-part2_express.pptx
@@ -13,6 +13,9 @@
     <p:sldId id="261" r:id="rId12"/>
     <p:sldId id="262" r:id="rId13"/>
     <p:sldId id="263" r:id="rId14"/>
+    <p:sldId id="264" r:id="rId15"/>
+    <p:sldId id="265" r:id="rId16"/>
+    <p:sldId id="266" r:id="rId17"/>
   </p:sldIdLst>
   <p:sldSz cx="10287000" cy="12858750" type="screen4x3"/>
   <p:notesSz cx="6858000" cy="9144000"/>
@@ -3105,22 +3108,1405 @@
       <p:grpSpPr/>
       <p:sp>
         <p:nvSpPr>
-          <p:cNvPr id="2" name="01_그림배경_1"/>
+          <p:cNvPr id="2" name="01_사진영상자리_01-1"/>
           <p:cNvSpPr/>
           <p:nvPr/>
         </p:nvSpPr>
         <p:spPr>
           <a:xfrm>
-            <a:off x="914400" y="3463826"/>
-            <a:ext cx="8458200" cy="4953000"/>
+            <a:off x="914400" y="3314700"/>
+            <a:ext cx="8458200" cy="5334000"/>
           </a:xfrm>
           <a:prstGeom prst="roundRect">
             <a:avLst>
-              <a:gd name="adj" fmla="val 4615"/>
+              <a:gd name="adj" fmla="val 0"/>
             </a:avLst>
           </a:prstGeom>
           <a:solidFill>
-            <a:srgbClr val="F0F7FC"/>
+            <a:srgbClr val="F3F5F7"/>
+          </a:solidFill>
+          <a:ln w="28575">
+            <a:solidFill>
+              <a:srgbClr val="B9C4CF"/>
+            </a:solidFill>
+            <a:prstDash val="dash"/>
+          </a:ln>
+          <a:effectLst/>
+        </p:spPr>
+        <p:txBody>
+          <a:bodyPr rtlCol="0" anchor="ctr"/>
+          <a:lstStyle/>
+          <a:p>
+            <a:pPr algn="ctr"/>
+          </a:p>
+        </p:txBody>
+      </p:sp>
+      <p:sp>
+        <p:nvSpPr>
+          <p:cNvPr id="3" name="01_headline_01"/>
+          <p:cNvSpPr txBox="1"/>
+          <p:nvPr/>
+        </p:nvSpPr>
+        <p:spPr>
+          <a:xfrm>
+            <a:off x="552152" y="988314"/>
+            <a:ext cx="9182695" cy="1089660"/>
+          </a:xfrm>
+          <a:prstGeom prst="rect">
+            <a:avLst/>
+          </a:prstGeom>
+          <a:noFill/>
+        </p:spPr>
+        <p:txBody>
+          <a:bodyPr wrap="none" lIns="0" rIns="0" tIns="0" bIns="0" anchor="t">
+            <a:noAutofit/>
+          </a:bodyPr>
+          <a:lstStyle/>
+          <a:p>
+            <a:pPr algn="ctr">
+              <a:lnSpc>
+                <a:spcPct val="100000"/>
+              </a:lnSpc>
+              <a:spcBef>
+                <a:spcPts val="0"/>
+              </a:spcBef>
+              <a:spcAft>
+                <a:spcPts val="0"/>
+              </a:spcAft>
+            </a:pPr>
+            <a:r>
+              <a:rPr sz="6600" b="0" i="0" spc="-231" lang="ko-KR" altLang="en-US">
+                <a:solidFill>
+                  <a:srgbClr val="121416"/>
+                </a:solidFill>
+                <a:latin typeface="Noto Sans KR W850"/>
+                <a:ea typeface="Noto Sans KR W850"/>
+                <a:cs typeface="Noto Sans KR W850"/>
+              </a:rPr>
+              <a:t>스쿼트 vs 레그 익스텐션,</a:t>
+            </a:r>
+          </a:p>
+        </p:txBody>
+      </p:sp>
+      <p:sp>
+        <p:nvSpPr>
+          <p:cNvPr id="4" name="01_headline_02"/>
+          <p:cNvSpPr txBox="1"/>
+          <p:nvPr/>
+        </p:nvSpPr>
+        <p:spPr>
+          <a:xfrm>
+            <a:off x="1278880" y="1977277"/>
+            <a:ext cx="7729240" cy="1089660"/>
+          </a:xfrm>
+          <a:prstGeom prst="rect">
+            <a:avLst/>
+          </a:prstGeom>
+          <a:noFill/>
+        </p:spPr>
+        <p:txBody>
+          <a:bodyPr wrap="none" lIns="0" rIns="0" tIns="0" bIns="0" anchor="t">
+            <a:noAutofit/>
+          </a:bodyPr>
+          <a:lstStyle/>
+          <a:p>
+            <a:pPr algn="ctr">
+              <a:lnSpc>
+                <a:spcPct val="100000"/>
+              </a:lnSpc>
+              <a:spcBef>
+                <a:spcPts val="0"/>
+              </a:spcBef>
+              <a:spcAft>
+                <a:spcPts val="0"/>
+              </a:spcAft>
+            </a:pPr>
+            <a:r>
+              <a:rPr sz="6600" b="0" i="0" spc="-231" lang="ko-KR" altLang="en-US">
+                <a:solidFill>
+                  <a:srgbClr val="0879D8"/>
+                </a:solidFill>
+                <a:latin typeface="Noto Sans KR W850"/>
+                <a:ea typeface="Noto Sans KR W850"/>
+                <a:cs typeface="Noto Sans KR W850"/>
+              </a:rPr>
+              <a:t>무릎</a:t>
+            </a:r>
+            <a:r>
+              <a:rPr sz="6600" b="0" i="0" spc="-231" lang="ko-KR" altLang="en-US">
+                <a:solidFill>
+                  <a:srgbClr val="121416"/>
+                </a:solidFill>
+                <a:latin typeface="Noto Sans KR W850"/>
+                <a:ea typeface="Noto Sans KR W850"/>
+                <a:cs typeface="Noto Sans KR W850"/>
+              </a:rPr>
+              <a:t>에 덜 부담인 건?</a:t>
+            </a:r>
+          </a:p>
+        </p:txBody>
+      </p:sp>
+      <p:sp>
+        <p:nvSpPr>
+          <p:cNvPr id="5" name="01_g-tag_03"/>
+          <p:cNvSpPr txBox="1"/>
+          <p:nvPr/>
+        </p:nvSpPr>
+        <p:spPr>
+          <a:xfrm>
+            <a:off x="3835896" y="5239191"/>
+            <a:ext cx="2615208" cy="396240"/>
+          </a:xfrm>
+          <a:prstGeom prst="rect">
+            <a:avLst/>
+          </a:prstGeom>
+          <a:noFill/>
+        </p:spPr>
+        <p:txBody>
+          <a:bodyPr wrap="none" lIns="0" rIns="0" tIns="0" bIns="0" anchor="t">
+            <a:noAutofit/>
+          </a:bodyPr>
+          <a:lstStyle/>
+          <a:p>
+            <a:pPr algn="ctr">
+              <a:lnSpc>
+                <a:spcPct val="100000"/>
+              </a:lnSpc>
+              <a:spcBef>
+                <a:spcPts val="0"/>
+              </a:spcBef>
+              <a:spcAft>
+                <a:spcPts val="0"/>
+              </a:spcAft>
+            </a:pPr>
+            <a:r>
+              <a:rPr sz="2400" b="0" i="0" spc="0" lang="ko-KR" altLang="en-US">
+                <a:solidFill>
+                  <a:srgbClr val="0879D8"/>
+                </a:solidFill>
+                <a:latin typeface="Noto Sans KR W700"/>
+                <a:ea typeface="Noto Sans KR W700"/>
+                <a:cs typeface="Noto Sans KR W700"/>
+              </a:rPr>
+              <a:t>사진 넣는 자리</a:t>
+            </a:r>
+          </a:p>
+        </p:txBody>
+      </p:sp>
+      <p:sp>
+        <p:nvSpPr>
+          <p:cNvPr id="6" name="01_strong_04"/>
+          <p:cNvSpPr txBox="1"/>
+          <p:nvPr/>
+        </p:nvSpPr>
+        <p:spPr>
+          <a:xfrm>
+            <a:off x="3230761" y="5736015"/>
+            <a:ext cx="3825329" cy="495300"/>
+          </a:xfrm>
+          <a:prstGeom prst="rect">
+            <a:avLst/>
+          </a:prstGeom>
+          <a:noFill/>
+        </p:spPr>
+        <p:txBody>
+          <a:bodyPr wrap="none" lIns="0" rIns="0" tIns="0" bIns="0" anchor="t">
+            <a:noAutofit/>
+          </a:bodyPr>
+          <a:lstStyle/>
+          <a:p>
+            <a:pPr algn="ctr">
+              <a:lnSpc>
+                <a:spcPct val="100000"/>
+              </a:lnSpc>
+              <a:spcBef>
+                <a:spcPts val="0"/>
+              </a:spcBef>
+              <a:spcAft>
+                <a:spcPts val="0"/>
+              </a:spcAft>
+            </a:pPr>
+            <a:r>
+              <a:rPr sz="3000" b="0" i="0" spc="-60" lang="ko-KR" altLang="en-US">
+                <a:solidFill>
+                  <a:srgbClr val="121416"/>
+                </a:solidFill>
+                <a:latin typeface="Noto Sans KR W800"/>
+                <a:ea typeface="Noto Sans KR W800"/>
+                <a:cs typeface="Noto Sans KR W800"/>
+              </a:rPr>
+              <a:t>표지: 운동하는 러너</a:t>
+            </a:r>
+          </a:p>
+        </p:txBody>
+      </p:sp>
+      <p:sp>
+        <p:nvSpPr>
+          <p:cNvPr id="7" name="01_g-spec_05"/>
+          <p:cNvSpPr txBox="1"/>
+          <p:nvPr/>
+        </p:nvSpPr>
+        <p:spPr>
+          <a:xfrm>
+            <a:off x="2424857" y="6344091"/>
+            <a:ext cx="5437138" cy="396240"/>
+          </a:xfrm>
+          <a:prstGeom prst="rect">
+            <a:avLst/>
+          </a:prstGeom>
+          <a:noFill/>
+        </p:spPr>
+        <p:txBody>
+          <a:bodyPr wrap="none" lIns="0" rIns="0" tIns="0" bIns="0" anchor="t">
+            <a:noAutofit/>
+          </a:bodyPr>
+          <a:lstStyle/>
+          <a:p>
+            <a:pPr algn="ctr">
+              <a:lnSpc>
+                <a:spcPct val="100000"/>
+              </a:lnSpc>
+              <a:spcBef>
+                <a:spcPts val="0"/>
+              </a:spcBef>
+              <a:spcAft>
+                <a:spcPts val="0"/>
+              </a:spcAft>
+            </a:pPr>
+            <a:r>
+              <a:rPr sz="2400" b="0" i="0" spc="0" lang="ko-KR" altLang="en-US">
+                <a:solidFill>
+                  <a:srgbClr val="5E6570"/>
+                </a:solidFill>
+                <a:latin typeface="Noto Sans KR W500"/>
+                <a:ea typeface="Noto Sans KR W500"/>
+                <a:cs typeface="Noto Sans KR W500"/>
+              </a:rPr>
+              <a:t>가로 888×560 · 표정·무릎이 보이게</a:t>
+            </a:r>
+          </a:p>
+        </p:txBody>
+      </p:sp>
+      <p:sp>
+        <p:nvSpPr>
+          <p:cNvPr id="8" name="01_abs_06"/>
+          <p:cNvSpPr txBox="1"/>
+          <p:nvPr/>
+        </p:nvSpPr>
+        <p:spPr>
+          <a:xfrm>
+            <a:off x="2352973" y="9134094"/>
+            <a:ext cx="5580906" cy="594360"/>
+          </a:xfrm>
+          <a:prstGeom prst="rect">
+            <a:avLst/>
+          </a:prstGeom>
+          <a:noFill/>
+        </p:spPr>
+        <p:txBody>
+          <a:bodyPr wrap="none" lIns="0" rIns="0" tIns="0" bIns="0" anchor="t">
+            <a:noAutofit/>
+          </a:bodyPr>
+          <a:lstStyle/>
+          <a:p>
+            <a:pPr algn="ctr">
+              <a:lnSpc>
+                <a:spcPct val="100000"/>
+              </a:lnSpc>
+              <a:spcBef>
+                <a:spcPts val="0"/>
+              </a:spcBef>
+              <a:spcAft>
+                <a:spcPts val="0"/>
+              </a:spcAft>
+            </a:pPr>
+            <a:r>
+              <a:rPr sz="3600" b="0" i="0" spc="-108" lang="ko-KR" altLang="en-US">
+                <a:solidFill>
+                  <a:srgbClr val="121416"/>
+                </a:solidFill>
+                <a:latin typeface="Noto Sans KR W700"/>
+                <a:ea typeface="Noto Sans KR W700"/>
+                <a:cs typeface="Noto Sans KR W700"/>
+              </a:rPr>
+              <a:t>정답은 운동 이름이 아니라</a:t>
+            </a:r>
+          </a:p>
+        </p:txBody>
+      </p:sp>
+      <p:sp>
+        <p:nvSpPr>
+          <p:cNvPr id="9" name="01_abs_07"/>
+          <p:cNvSpPr txBox="1"/>
+          <p:nvPr/>
+        </p:nvSpPr>
+        <p:spPr>
+          <a:xfrm>
+            <a:off x="2681734" y="9774055"/>
+            <a:ext cx="4923532" cy="594360"/>
+          </a:xfrm>
+          <a:prstGeom prst="rect">
+            <a:avLst/>
+          </a:prstGeom>
+          <a:noFill/>
+        </p:spPr>
+        <p:txBody>
+          <a:bodyPr wrap="none" lIns="0" rIns="0" tIns="0" bIns="0" anchor="t">
+            <a:noAutofit/>
+          </a:bodyPr>
+          <a:lstStyle/>
+          <a:p>
+            <a:pPr algn="ctr">
+              <a:lnSpc>
+                <a:spcPct val="100000"/>
+              </a:lnSpc>
+              <a:spcBef>
+                <a:spcPts val="0"/>
+              </a:spcBef>
+              <a:spcAft>
+                <a:spcPts val="0"/>
+              </a:spcAft>
+            </a:pPr>
+            <a:r>
+              <a:rPr sz="3600" b="0" i="0" spc="-108" lang="ko-KR" altLang="en-US">
+                <a:solidFill>
+                  <a:srgbClr val="121416"/>
+                </a:solidFill>
+                <a:latin typeface="Noto Sans KR W700"/>
+                <a:ea typeface="Noto Sans KR W700"/>
+                <a:cs typeface="Noto Sans KR W700"/>
+              </a:rPr>
+              <a:t>‘무릎 각도’에 있습니다</a:t>
+            </a:r>
+          </a:p>
+        </p:txBody>
+      </p:sp>
+      <p:sp>
+        <p:nvSpPr>
+          <p:cNvPr id="10" name="01_abs_08"/>
+          <p:cNvSpPr txBox="1"/>
+          <p:nvPr/>
+        </p:nvSpPr>
+        <p:spPr>
+          <a:xfrm>
+            <a:off x="1758851" y="10636758"/>
+            <a:ext cx="6769298" cy="445770"/>
+          </a:xfrm>
+          <a:prstGeom prst="rect">
+            <a:avLst/>
+          </a:prstGeom>
+          <a:noFill/>
+        </p:spPr>
+        <p:txBody>
+          <a:bodyPr wrap="none" lIns="0" rIns="0" tIns="0" bIns="0" anchor="t">
+            <a:noAutofit/>
+          </a:bodyPr>
+          <a:lstStyle/>
+          <a:p>
+            <a:pPr algn="ctr">
+              <a:lnSpc>
+                <a:spcPct val="100000"/>
+              </a:lnSpc>
+              <a:spcBef>
+                <a:spcPts val="0"/>
+              </a:spcBef>
+              <a:spcAft>
+                <a:spcPts val="0"/>
+              </a:spcAft>
+            </a:pPr>
+            <a:r>
+              <a:rPr sz="2700" b="0" i="0" spc="-54" lang="ko-KR" altLang="en-US">
+                <a:solidFill>
+                  <a:srgbClr val="5E6570"/>
+                </a:solidFill>
+                <a:latin typeface="Noto Sans KR W500"/>
+                <a:ea typeface="Noto Sans KR W500"/>
+                <a:cs typeface="Noto Sans KR W500"/>
+              </a:rPr>
+              <a:t>PFP 2탄 · 1탄 ‘러너의 무릎 앞 통증’ 이어서</a:t>
+            </a:r>
+          </a:p>
+        </p:txBody>
+      </p:sp>
+      <p:sp>
+        <p:nvSpPr>
+          <p:cNvPr id="11" name="01_B01프레임"/>
+          <p:cNvSpPr/>
+          <p:nvPr/>
+        </p:nvSpPr>
+        <p:spPr>
+          <a:xfrm>
+            <a:off x="323850" y="323850"/>
+            <a:ext cx="9639300" cy="12211050"/>
+          </a:xfrm>
+          <a:prstGeom prst="roundRect">
+            <a:avLst>
+              <a:gd name="adj" fmla="val 2766"/>
+            </a:avLst>
+          </a:prstGeom>
+          <a:noFill/>
+          <a:ln w="19050">
+            <a:solidFill>
+              <a:srgbClr val="D0DCE5"/>
+            </a:solidFill>
+          </a:ln>
+          <a:effectLst/>
+        </p:spPr>
+        <p:txBody>
+          <a:bodyPr rtlCol="0" anchor="ctr"/>
+          <a:lstStyle/>
+          <a:p>
+            <a:pPr algn="ctr"/>
+          </a:p>
+        </p:txBody>
+      </p:sp>
+    </p:spTree>
+  </p:cSld>
+  <p:clrMapOvr>
+    <a:masterClrMapping/>
+  </p:clrMapOvr>
+</p:sld>
+</file>
+
+<file path=ppt/slides/slide10.xml><?xml version="1.0" encoding="utf-8"?>
+<p:sld xmlns:a="http://schemas.openxmlformats.org/drawingml/2006/main" xmlns:p="http://schemas.openxmlformats.org/presentationml/2006/main" xmlns:r="http://schemas.openxmlformats.org/officeDocument/2006/relationships">
+  <p:cSld>
+    <p:bg>
+      <p:bgPr>
+        <a:solidFill>
+          <a:srgbClr val="FFFFFF"/>
+        </a:solidFill>
+        <a:effectLst/>
+      </p:bgPr>
+    </p:bg>
+    <p:spTree>
+      <p:nvGrpSpPr>
+        <p:cNvPr id="1" name=""/>
+        <p:cNvGrpSpPr/>
+        <p:nvPr/>
+      </p:nvGrpSpPr>
+      <p:grpSpPr/>
+      <p:sp>
+        <p:nvSpPr>
+          <p:cNvPr id="2" name="10_사진영상자리_10-1"/>
+          <p:cNvSpPr/>
+          <p:nvPr/>
+        </p:nvSpPr>
+        <p:spPr>
+          <a:xfrm>
+            <a:off x="914400" y="3238500"/>
+            <a:ext cx="4114800" cy="7315200"/>
+          </a:xfrm>
+          <a:prstGeom prst="roundRect">
+            <a:avLst>
+              <a:gd name="adj" fmla="val 0"/>
+            </a:avLst>
+          </a:prstGeom>
+          <a:solidFill>
+            <a:srgbClr val="F3F5F7"/>
+          </a:solidFill>
+          <a:ln w="28575">
+            <a:solidFill>
+              <a:srgbClr val="B9C4CF"/>
+            </a:solidFill>
+            <a:prstDash val="dash"/>
+          </a:ln>
+          <a:effectLst/>
+        </p:spPr>
+        <p:txBody>
+          <a:bodyPr rtlCol="0" anchor="ctr"/>
+          <a:lstStyle/>
+          <a:p>
+            <a:pPr algn="ctr"/>
+          </a:p>
+        </p:txBody>
+      </p:sp>
+      <p:sp>
+        <p:nvSpPr>
+          <p:cNvPr id="3" name="10_headline_01"/>
+          <p:cNvSpPr txBox="1"/>
+          <p:nvPr/>
+        </p:nvSpPr>
+        <p:spPr>
+          <a:xfrm>
+            <a:off x="1255514" y="997077"/>
+            <a:ext cx="7775823" cy="1040130"/>
+          </a:xfrm>
+          <a:prstGeom prst="rect">
+            <a:avLst/>
+          </a:prstGeom>
+          <a:noFill/>
+        </p:spPr>
+        <p:txBody>
+          <a:bodyPr wrap="none" lIns="0" rIns="0" tIns="0" bIns="0" anchor="t">
+            <a:noAutofit/>
+          </a:bodyPr>
+          <a:lstStyle/>
+          <a:p>
+            <a:pPr algn="ctr">
+              <a:lnSpc>
+                <a:spcPct val="100000"/>
+              </a:lnSpc>
+              <a:spcBef>
+                <a:spcPts val="0"/>
+              </a:spcBef>
+              <a:spcAft>
+                <a:spcPts val="0"/>
+              </a:spcAft>
+            </a:pPr>
+            <a:r>
+              <a:rPr sz="6300" b="0" i="0" spc="-220" lang="ko-KR" altLang="en-US">
+                <a:solidFill>
+                  <a:srgbClr val="121416"/>
+                </a:solidFill>
+                <a:latin typeface="Noto Sans KR W850"/>
+                <a:ea typeface="Noto Sans KR W850"/>
+                <a:cs typeface="Noto Sans KR W850"/>
+              </a:rPr>
+              <a:t>싱글 레그 데드리프트,</a:t>
+            </a:r>
+          </a:p>
+        </p:txBody>
+      </p:sp>
+      <p:sp>
+        <p:nvSpPr>
+          <p:cNvPr id="4" name="10_headline_02"/>
+          <p:cNvSpPr txBox="1"/>
+          <p:nvPr/>
+        </p:nvSpPr>
+        <p:spPr>
+          <a:xfrm>
+            <a:off x="2894112" y="1957167"/>
+            <a:ext cx="4498628" cy="1040130"/>
+          </a:xfrm>
+          <a:prstGeom prst="rect">
+            <a:avLst/>
+          </a:prstGeom>
+          <a:noFill/>
+        </p:spPr>
+        <p:txBody>
+          <a:bodyPr wrap="none" lIns="0" rIns="0" tIns="0" bIns="0" anchor="t">
+            <a:noAutofit/>
+          </a:bodyPr>
+          <a:lstStyle/>
+          <a:p>
+            <a:pPr algn="ctr">
+              <a:lnSpc>
+                <a:spcPct val="100000"/>
+              </a:lnSpc>
+              <a:spcBef>
+                <a:spcPts val="0"/>
+              </a:spcBef>
+              <a:spcAft>
+                <a:spcPts val="0"/>
+              </a:spcAft>
+            </a:pPr>
+            <a:r>
+              <a:rPr sz="6300" b="0" i="0" spc="-220" lang="ko-KR" altLang="en-US">
+                <a:solidFill>
+                  <a:srgbClr val="0879D8"/>
+                </a:solidFill>
+                <a:latin typeface="Noto Sans KR W850"/>
+                <a:ea typeface="Noto Sans KR W850"/>
+                <a:cs typeface="Noto Sans KR W850"/>
+              </a:rPr>
+              <a:t>앞에서</a:t>
+            </a:r>
+            <a:r>
+              <a:rPr sz="6300" b="0" i="0" spc="-220" lang="ko-KR" altLang="en-US">
+                <a:solidFill>
+                  <a:srgbClr val="121416"/>
+                </a:solidFill>
+                <a:latin typeface="Noto Sans KR W850"/>
+                <a:ea typeface="Noto Sans KR W850"/>
+                <a:cs typeface="Noto Sans KR W850"/>
+              </a:rPr>
+              <a:t> 보기</a:t>
+            </a:r>
+          </a:p>
+        </p:txBody>
+      </p:sp>
+      <p:sp>
+        <p:nvSpPr>
+          <p:cNvPr id="5" name="10_g-tag_03"/>
+          <p:cNvSpPr txBox="1"/>
+          <p:nvPr/>
+        </p:nvSpPr>
+        <p:spPr>
+          <a:xfrm>
+            <a:off x="1664196" y="5905941"/>
+            <a:ext cx="2615208" cy="396240"/>
+          </a:xfrm>
+          <a:prstGeom prst="rect">
+            <a:avLst/>
+          </a:prstGeom>
+          <a:noFill/>
+        </p:spPr>
+        <p:txBody>
+          <a:bodyPr wrap="none" lIns="0" rIns="0" tIns="0" bIns="0" anchor="t">
+            <a:noAutofit/>
+          </a:bodyPr>
+          <a:lstStyle/>
+          <a:p>
+            <a:pPr algn="ctr">
+              <a:lnSpc>
+                <a:spcPct val="100000"/>
+              </a:lnSpc>
+              <a:spcBef>
+                <a:spcPts val="0"/>
+              </a:spcBef>
+              <a:spcAft>
+                <a:spcPts val="0"/>
+              </a:spcAft>
+            </a:pPr>
+            <a:r>
+              <a:rPr sz="2400" b="0" i="0" spc="0" lang="ko-KR" altLang="en-US">
+                <a:solidFill>
+                  <a:srgbClr val="0879D8"/>
+                </a:solidFill>
+                <a:latin typeface="Noto Sans KR W700"/>
+                <a:ea typeface="Noto Sans KR W700"/>
+                <a:cs typeface="Noto Sans KR W700"/>
+              </a:rPr>
+              <a:t>영상 넣는 자리</a:t>
+            </a:r>
+          </a:p>
+        </p:txBody>
+      </p:sp>
+      <p:sp>
+        <p:nvSpPr>
+          <p:cNvPr id="6" name="10_strong_04"/>
+          <p:cNvSpPr txBox="1"/>
+          <p:nvPr/>
+        </p:nvSpPr>
+        <p:spPr>
+          <a:xfrm>
+            <a:off x="948630" y="6402765"/>
+            <a:ext cx="4046339" cy="495300"/>
+          </a:xfrm>
+          <a:prstGeom prst="rect">
+            <a:avLst/>
+          </a:prstGeom>
+          <a:noFill/>
+        </p:spPr>
+        <p:txBody>
+          <a:bodyPr wrap="none" lIns="0" rIns="0" tIns="0" bIns="0" anchor="t">
+            <a:noAutofit/>
+          </a:bodyPr>
+          <a:lstStyle/>
+          <a:p>
+            <a:pPr algn="ctr">
+              <a:lnSpc>
+                <a:spcPct val="100000"/>
+              </a:lnSpc>
+              <a:spcBef>
+                <a:spcPts val="0"/>
+              </a:spcBef>
+              <a:spcAft>
+                <a:spcPts val="0"/>
+              </a:spcAft>
+            </a:pPr>
+            <a:r>
+              <a:rPr sz="3000" b="0" i="0" spc="-60" lang="ko-KR" altLang="en-US">
+                <a:solidFill>
+                  <a:srgbClr val="121416"/>
+                </a:solidFill>
+                <a:latin typeface="Noto Sans KR W800"/>
+                <a:ea typeface="Noto Sans KR W800"/>
+                <a:cs typeface="Noto Sans KR W800"/>
+              </a:rPr>
+              <a:t>싱글 레그 데드리프트</a:t>
+            </a:r>
+          </a:p>
+        </p:txBody>
+      </p:sp>
+      <p:sp>
+        <p:nvSpPr>
+          <p:cNvPr id="7" name="10_strong_05"/>
+          <p:cNvSpPr txBox="1"/>
+          <p:nvPr/>
+        </p:nvSpPr>
+        <p:spPr>
+          <a:xfrm>
+            <a:off x="2247900" y="6898065"/>
+            <a:ext cx="1447800" cy="495300"/>
+          </a:xfrm>
+          <a:prstGeom prst="rect">
+            <a:avLst/>
+          </a:prstGeom>
+          <a:noFill/>
+        </p:spPr>
+        <p:txBody>
+          <a:bodyPr wrap="none" lIns="0" rIns="0" tIns="0" bIns="0" anchor="t">
+            <a:noAutofit/>
+          </a:bodyPr>
+          <a:lstStyle/>
+          <a:p>
+            <a:pPr algn="ctr">
+              <a:lnSpc>
+                <a:spcPct val="100000"/>
+              </a:lnSpc>
+              <a:spcBef>
+                <a:spcPts val="0"/>
+              </a:spcBef>
+              <a:spcAft>
+                <a:spcPts val="0"/>
+              </a:spcAft>
+            </a:pPr>
+            <a:r>
+              <a:rPr sz="3000" b="0" i="0" spc="-60" lang="ko-KR" altLang="en-US">
+                <a:solidFill>
+                  <a:srgbClr val="121416"/>
+                </a:solidFill>
+                <a:latin typeface="Noto Sans KR W800"/>
+                <a:ea typeface="Noto Sans KR W800"/>
+                <a:cs typeface="Noto Sans KR W800"/>
+              </a:rPr>
+              <a:t>정면</a:t>
+            </a:r>
+          </a:p>
+        </p:txBody>
+      </p:sp>
+      <p:sp>
+        <p:nvSpPr>
+          <p:cNvPr id="8" name="10_g-spec_06"/>
+          <p:cNvSpPr txBox="1"/>
+          <p:nvPr/>
+        </p:nvSpPr>
+        <p:spPr>
+          <a:xfrm>
+            <a:off x="1224111" y="7506141"/>
+            <a:ext cx="3495229" cy="396240"/>
+          </a:xfrm>
+          <a:prstGeom prst="rect">
+            <a:avLst/>
+          </a:prstGeom>
+          <a:noFill/>
+        </p:spPr>
+        <p:txBody>
+          <a:bodyPr wrap="none" lIns="0" rIns="0" tIns="0" bIns="0" anchor="t">
+            <a:noAutofit/>
+          </a:bodyPr>
+          <a:lstStyle/>
+          <a:p>
+            <a:pPr algn="ctr">
+              <a:lnSpc>
+                <a:spcPct val="100000"/>
+              </a:lnSpc>
+              <a:spcBef>
+                <a:spcPts val="0"/>
+              </a:spcBef>
+              <a:spcAft>
+                <a:spcPts val="0"/>
+              </a:spcAft>
+            </a:pPr>
+            <a:r>
+              <a:rPr sz="2400" b="0" i="0" spc="0" lang="ko-KR" altLang="en-US">
+                <a:solidFill>
+                  <a:srgbClr val="5E6570"/>
+                </a:solidFill>
+                <a:latin typeface="Noto Sans KR W500"/>
+                <a:ea typeface="Noto Sans KR W500"/>
+                <a:cs typeface="Noto Sans KR W500"/>
+              </a:rPr>
+              <a:t>세로 9:16 · 무릎·골반</a:t>
+            </a:r>
+          </a:p>
+        </p:txBody>
+      </p:sp>
+      <p:sp>
+        <p:nvSpPr>
+          <p:cNvPr id="9" name="10_item-h_07"/>
+          <p:cNvSpPr txBox="1"/>
+          <p:nvPr/>
+        </p:nvSpPr>
+        <p:spPr>
+          <a:xfrm>
+            <a:off x="6527155" y="3571494"/>
+            <a:ext cx="1575941" cy="594360"/>
+          </a:xfrm>
+          <a:prstGeom prst="rect">
+            <a:avLst/>
+          </a:prstGeom>
+          <a:noFill/>
+        </p:spPr>
+        <p:txBody>
+          <a:bodyPr wrap="none" lIns="0" rIns="0" tIns="0" bIns="0" anchor="t">
+            <a:noAutofit/>
+          </a:bodyPr>
+          <a:lstStyle/>
+          <a:p>
+            <a:pPr algn="ctr">
+              <a:lnSpc>
+                <a:spcPct val="100000"/>
+              </a:lnSpc>
+              <a:spcBef>
+                <a:spcPts val="0"/>
+              </a:spcBef>
+              <a:spcAft>
+                <a:spcPts val="0"/>
+              </a:spcAft>
+            </a:pPr>
+            <a:r>
+              <a:rPr sz="3600" b="0" i="0" spc="-108" lang="ko-KR" altLang="en-US">
+                <a:solidFill>
+                  <a:srgbClr val="121416"/>
+                </a:solidFill>
+                <a:latin typeface="Noto Sans KR W800"/>
+                <a:ea typeface="Noto Sans KR W800"/>
+                <a:cs typeface="Noto Sans KR W800"/>
+              </a:rPr>
+              <a:t>무릎</a:t>
+            </a:r>
+          </a:p>
+        </p:txBody>
+      </p:sp>
+      <p:sp>
+        <p:nvSpPr>
+          <p:cNvPr id="10" name="10_body_08"/>
+          <p:cNvSpPr txBox="1"/>
+          <p:nvPr/>
+        </p:nvSpPr>
+        <p:spPr>
+          <a:xfrm>
+            <a:off x="5581799" y="4211866"/>
+            <a:ext cx="3466802" cy="495300"/>
+          </a:xfrm>
+          <a:prstGeom prst="rect">
+            <a:avLst/>
+          </a:prstGeom>
+          <a:noFill/>
+        </p:spPr>
+        <p:txBody>
+          <a:bodyPr wrap="none" lIns="0" rIns="0" tIns="0" bIns="0" anchor="t">
+            <a:noAutofit/>
+          </a:bodyPr>
+          <a:lstStyle/>
+          <a:p>
+            <a:pPr algn="ctr">
+              <a:lnSpc>
+                <a:spcPct val="100000"/>
+              </a:lnSpc>
+              <a:spcBef>
+                <a:spcPts val="0"/>
+              </a:spcBef>
+              <a:spcAft>
+                <a:spcPts val="0"/>
+              </a:spcAft>
+            </a:pPr>
+            <a:r>
+              <a:rPr sz="3000" b="0" i="0" spc="-60" lang="ko-KR" altLang="en-US">
+                <a:solidFill>
+                  <a:srgbClr val="121416"/>
+                </a:solidFill>
+                <a:latin typeface="Noto Sans KR W500"/>
+                <a:ea typeface="Noto Sans KR W500"/>
+                <a:cs typeface="Noto Sans KR W500"/>
+              </a:rPr>
+              <a:t>둘째 발가락 방향,</a:t>
+            </a:r>
+          </a:p>
+        </p:txBody>
+      </p:sp>
+      <p:sp>
+        <p:nvSpPr>
+          <p:cNvPr id="11" name="10_body_09"/>
+          <p:cNvSpPr txBox="1"/>
+          <p:nvPr/>
+        </p:nvSpPr>
+        <p:spPr>
+          <a:xfrm>
+            <a:off x="5463480" y="4729936"/>
+            <a:ext cx="3703439" cy="495300"/>
+          </a:xfrm>
+          <a:prstGeom prst="rect">
+            <a:avLst/>
+          </a:prstGeom>
+          <a:noFill/>
+        </p:spPr>
+        <p:txBody>
+          <a:bodyPr wrap="none" lIns="0" rIns="0" tIns="0" bIns="0" anchor="t">
+            <a:noAutofit/>
+          </a:bodyPr>
+          <a:lstStyle/>
+          <a:p>
+            <a:pPr algn="ctr">
+              <a:lnSpc>
+                <a:spcPct val="100000"/>
+              </a:lnSpc>
+              <a:spcBef>
+                <a:spcPts val="0"/>
+              </a:spcBef>
+              <a:spcAft>
+                <a:spcPts val="0"/>
+              </a:spcAft>
+            </a:pPr>
+            <a:r>
+              <a:rPr sz="3000" b="0" i="0" spc="-60" lang="ko-KR" altLang="en-US">
+                <a:solidFill>
+                  <a:srgbClr val="121416"/>
+                </a:solidFill>
+                <a:latin typeface="Noto Sans KR W500"/>
+                <a:ea typeface="Noto Sans KR W500"/>
+                <a:cs typeface="Noto Sans KR W500"/>
+              </a:rPr>
+              <a:t>안으로 모이지 않게</a:t>
+            </a:r>
+          </a:p>
+        </p:txBody>
+      </p:sp>
+      <p:sp>
+        <p:nvSpPr>
+          <p:cNvPr id="12" name="10_item-h_10"/>
+          <p:cNvSpPr txBox="1"/>
+          <p:nvPr/>
+        </p:nvSpPr>
+        <p:spPr>
+          <a:xfrm>
+            <a:off x="6527155" y="5659106"/>
+            <a:ext cx="1575941" cy="594360"/>
+          </a:xfrm>
+          <a:prstGeom prst="rect">
+            <a:avLst/>
+          </a:prstGeom>
+          <a:noFill/>
+        </p:spPr>
+        <p:txBody>
+          <a:bodyPr wrap="none" lIns="0" rIns="0" tIns="0" bIns="0" anchor="t">
+            <a:noAutofit/>
+          </a:bodyPr>
+          <a:lstStyle/>
+          <a:p>
+            <a:pPr algn="ctr">
+              <a:lnSpc>
+                <a:spcPct val="100000"/>
+              </a:lnSpc>
+              <a:spcBef>
+                <a:spcPts val="0"/>
+              </a:spcBef>
+              <a:spcAft>
+                <a:spcPts val="0"/>
+              </a:spcAft>
+            </a:pPr>
+            <a:r>
+              <a:rPr sz="3600" b="0" i="0" spc="-108" lang="ko-KR" altLang="en-US">
+                <a:solidFill>
+                  <a:srgbClr val="121416"/>
+                </a:solidFill>
+                <a:latin typeface="Noto Sans KR W800"/>
+                <a:ea typeface="Noto Sans KR W800"/>
+                <a:cs typeface="Noto Sans KR W800"/>
+              </a:rPr>
+              <a:t>골반</a:t>
+            </a:r>
+          </a:p>
+        </p:txBody>
+      </p:sp>
+      <p:sp>
+        <p:nvSpPr>
+          <p:cNvPr id="13" name="10_body_11"/>
+          <p:cNvSpPr txBox="1"/>
+          <p:nvPr/>
+        </p:nvSpPr>
+        <p:spPr>
+          <a:xfrm>
+            <a:off x="6027390" y="6299478"/>
+            <a:ext cx="2575620" cy="495300"/>
+          </a:xfrm>
+          <a:prstGeom prst="rect">
+            <a:avLst/>
+          </a:prstGeom>
+          <a:noFill/>
+        </p:spPr>
+        <p:txBody>
+          <a:bodyPr wrap="none" lIns="0" rIns="0" tIns="0" bIns="0" anchor="t">
+            <a:noAutofit/>
+          </a:bodyPr>
+          <a:lstStyle/>
+          <a:p>
+            <a:pPr algn="ctr">
+              <a:lnSpc>
+                <a:spcPct val="100000"/>
+              </a:lnSpc>
+              <a:spcBef>
+                <a:spcPts val="0"/>
+              </a:spcBef>
+              <a:spcAft>
+                <a:spcPts val="0"/>
+              </a:spcAft>
+            </a:pPr>
+            <a:r>
+              <a:rPr sz="3000" b="0" i="0" spc="-60" lang="ko-KR" altLang="en-US">
+                <a:solidFill>
+                  <a:srgbClr val="121416"/>
+                </a:solidFill>
+                <a:latin typeface="Noto Sans KR W500"/>
+                <a:ea typeface="Noto Sans KR W500"/>
+                <a:cs typeface="Noto Sans KR W500"/>
+              </a:rPr>
+              <a:t>양쪽 높이를</a:t>
+            </a:r>
+          </a:p>
+        </p:txBody>
+      </p:sp>
+      <p:sp>
+        <p:nvSpPr>
+          <p:cNvPr id="14" name="10_body_12"/>
+          <p:cNvSpPr txBox="1"/>
+          <p:nvPr/>
+        </p:nvSpPr>
+        <p:spPr>
+          <a:xfrm>
+            <a:off x="5855940" y="6817549"/>
+            <a:ext cx="2918520" cy="495300"/>
+          </a:xfrm>
+          <a:prstGeom prst="rect">
+            <a:avLst/>
+          </a:prstGeom>
+          <a:noFill/>
+        </p:spPr>
+        <p:txBody>
+          <a:bodyPr wrap="none" lIns="0" rIns="0" tIns="0" bIns="0" anchor="t">
+            <a:noAutofit/>
+          </a:bodyPr>
+          <a:lstStyle/>
+          <a:p>
+            <a:pPr algn="ctr">
+              <a:lnSpc>
+                <a:spcPct val="100000"/>
+              </a:lnSpc>
+              <a:spcBef>
+                <a:spcPts val="0"/>
+              </a:spcBef>
+              <a:spcAft>
+                <a:spcPts val="0"/>
+              </a:spcAft>
+            </a:pPr>
+            <a:r>
+              <a:rPr sz="3000" b="0" i="0" spc="-60" lang="ko-KR" altLang="en-US">
+                <a:solidFill>
+                  <a:srgbClr val="121416"/>
+                </a:solidFill>
+                <a:latin typeface="Noto Sans KR W500"/>
+                <a:ea typeface="Noto Sans KR W500"/>
+                <a:cs typeface="Noto Sans KR W500"/>
+              </a:rPr>
+              <a:t>수평으로 유지</a:t>
+            </a:r>
+          </a:p>
+        </p:txBody>
+      </p:sp>
+      <p:sp>
+        <p:nvSpPr>
+          <p:cNvPr id="15" name="10_item-h_13"/>
+          <p:cNvSpPr txBox="1"/>
+          <p:nvPr/>
+        </p:nvSpPr>
+        <p:spPr>
+          <a:xfrm>
+            <a:off x="6527155" y="7746718"/>
+            <a:ext cx="1575941" cy="594360"/>
+          </a:xfrm>
+          <a:prstGeom prst="rect">
+            <a:avLst/>
+          </a:prstGeom>
+          <a:noFill/>
+        </p:spPr>
+        <p:txBody>
+          <a:bodyPr wrap="none" lIns="0" rIns="0" tIns="0" bIns="0" anchor="t">
+            <a:noAutofit/>
+          </a:bodyPr>
+          <a:lstStyle/>
+          <a:p>
+            <a:pPr algn="ctr">
+              <a:lnSpc>
+                <a:spcPct val="100000"/>
+              </a:lnSpc>
+              <a:spcBef>
+                <a:spcPts val="0"/>
+              </a:spcBef>
+              <a:spcAft>
+                <a:spcPts val="0"/>
+              </a:spcAft>
+            </a:pPr>
+            <a:r>
+              <a:rPr sz="3600" b="0" i="0" spc="-108" lang="ko-KR" altLang="en-US">
+                <a:solidFill>
+                  <a:srgbClr val="121416"/>
+                </a:solidFill>
+                <a:latin typeface="Noto Sans KR W800"/>
+                <a:ea typeface="Noto Sans KR W800"/>
+                <a:cs typeface="Noto Sans KR W800"/>
+              </a:rPr>
+              <a:t>몸통</a:t>
+            </a:r>
+          </a:p>
+        </p:txBody>
+      </p:sp>
+      <p:sp>
+        <p:nvSpPr>
+          <p:cNvPr id="16" name="10_body_14"/>
+          <p:cNvSpPr txBox="1"/>
+          <p:nvPr/>
+        </p:nvSpPr>
+        <p:spPr>
+          <a:xfrm>
+            <a:off x="5634930" y="8387090"/>
+            <a:ext cx="3360539" cy="495300"/>
+          </a:xfrm>
+          <a:prstGeom prst="rect">
+            <a:avLst/>
+          </a:prstGeom>
+          <a:noFill/>
+        </p:spPr>
+        <p:txBody>
+          <a:bodyPr wrap="none" lIns="0" rIns="0" tIns="0" bIns="0" anchor="t">
+            <a:noAutofit/>
+          </a:bodyPr>
+          <a:lstStyle/>
+          <a:p>
+            <a:pPr algn="ctr">
+              <a:lnSpc>
+                <a:spcPct val="100000"/>
+              </a:lnSpc>
+              <a:spcBef>
+                <a:spcPts val="0"/>
+              </a:spcBef>
+              <a:spcAft>
+                <a:spcPts val="0"/>
+              </a:spcAft>
+            </a:pPr>
+            <a:r>
+              <a:rPr sz="3000" b="0" i="0" spc="-60" lang="ko-KR" altLang="en-US">
+                <a:solidFill>
+                  <a:srgbClr val="121416"/>
+                </a:solidFill>
+                <a:latin typeface="Noto Sans KR W500"/>
+                <a:ea typeface="Noto Sans KR W500"/>
+                <a:cs typeface="Noto Sans KR W500"/>
+              </a:rPr>
+              <a:t>지지 다리 쪽으로</a:t>
+            </a:r>
+          </a:p>
+        </p:txBody>
+      </p:sp>
+      <p:sp>
+        <p:nvSpPr>
+          <p:cNvPr id="17" name="10_body_15"/>
+          <p:cNvSpPr txBox="1"/>
+          <p:nvPr/>
+        </p:nvSpPr>
+        <p:spPr>
+          <a:xfrm>
+            <a:off x="6027390" y="8905161"/>
+            <a:ext cx="2575620" cy="495300"/>
+          </a:xfrm>
+          <a:prstGeom prst="rect">
+            <a:avLst/>
+          </a:prstGeom>
+          <a:noFill/>
+        </p:spPr>
+        <p:txBody>
+          <a:bodyPr wrap="none" lIns="0" rIns="0" tIns="0" bIns="0" anchor="t">
+            <a:noAutofit/>
+          </a:bodyPr>
+          <a:lstStyle/>
+          <a:p>
+            <a:pPr algn="ctr">
+              <a:lnSpc>
+                <a:spcPct val="100000"/>
+              </a:lnSpc>
+              <a:spcBef>
+                <a:spcPts val="0"/>
+              </a:spcBef>
+              <a:spcAft>
+                <a:spcPts val="0"/>
+              </a:spcAft>
+            </a:pPr>
+            <a:r>
+              <a:rPr sz="3000" b="0" i="0" spc="-60" lang="ko-KR" altLang="en-US">
+                <a:solidFill>
+                  <a:srgbClr val="121416"/>
+                </a:solidFill>
+                <a:latin typeface="Noto Sans KR W500"/>
+                <a:ea typeface="Noto Sans KR W500"/>
+                <a:cs typeface="Noto Sans KR W500"/>
+              </a:rPr>
+              <a:t>기울지 않게</a:t>
+            </a:r>
+          </a:p>
+        </p:txBody>
+      </p:sp>
+      <p:sp>
+        <p:nvSpPr>
+          <p:cNvPr id="18" name="10_abs_16"/>
+          <p:cNvSpPr txBox="1"/>
+          <p:nvPr/>
+        </p:nvSpPr>
+        <p:spPr>
+          <a:xfrm>
+            <a:off x="5658743" y="10029444"/>
+            <a:ext cx="3312765" cy="594360"/>
+          </a:xfrm>
+          <a:prstGeom prst="rect">
+            <a:avLst/>
+          </a:prstGeom>
+          <a:noFill/>
+        </p:spPr>
+        <p:txBody>
+          <a:bodyPr wrap="none" lIns="0" rIns="0" tIns="0" bIns="0" anchor="t">
+            <a:noAutofit/>
+          </a:bodyPr>
+          <a:lstStyle/>
+          <a:p>
+            <a:pPr algn="ctr">
+              <a:lnSpc>
+                <a:spcPct val="100000"/>
+              </a:lnSpc>
+              <a:spcBef>
+                <a:spcPts val="0"/>
+              </a:spcBef>
+              <a:spcAft>
+                <a:spcPts val="0"/>
+              </a:spcAft>
+            </a:pPr>
+            <a:r>
+              <a:rPr sz="3600" b="0" i="0" spc="-108" lang="ko-KR" altLang="en-US">
+                <a:solidFill>
+                  <a:srgbClr val="121416"/>
+                </a:solidFill>
+                <a:latin typeface="Noto Sans KR W800"/>
+                <a:ea typeface="Noto Sans KR W800"/>
+                <a:cs typeface="Noto Sans KR W800"/>
+              </a:rPr>
+              <a:t>1탄의 움직임,</a:t>
+            </a:r>
+          </a:p>
+        </p:txBody>
+      </p:sp>
+      <p:sp>
+        <p:nvSpPr>
+          <p:cNvPr id="19" name="10_abs_17"/>
+          <p:cNvSpPr txBox="1"/>
+          <p:nvPr/>
+        </p:nvSpPr>
+        <p:spPr>
+          <a:xfrm>
+            <a:off x="6006703" y="10623715"/>
+            <a:ext cx="2616994" cy="594360"/>
+          </a:xfrm>
+          <a:prstGeom prst="rect">
+            <a:avLst/>
+          </a:prstGeom>
+          <a:noFill/>
+        </p:spPr>
+        <p:txBody>
+          <a:bodyPr wrap="none" lIns="0" rIns="0" tIns="0" bIns="0" anchor="t">
+            <a:noAutofit/>
+          </a:bodyPr>
+          <a:lstStyle/>
+          <a:p>
+            <a:pPr algn="ctr">
+              <a:lnSpc>
+                <a:spcPct val="100000"/>
+              </a:lnSpc>
+              <a:spcBef>
+                <a:spcPts val="0"/>
+              </a:spcBef>
+              <a:spcAft>
+                <a:spcPts val="0"/>
+              </a:spcAft>
+            </a:pPr>
+            <a:r>
+              <a:rPr sz="3600" b="0" i="0" spc="-108" lang="ko-KR" altLang="en-US">
+                <a:solidFill>
+                  <a:srgbClr val="121416"/>
+                </a:solidFill>
+                <a:latin typeface="Noto Sans KR W800"/>
+                <a:ea typeface="Noto Sans KR W800"/>
+                <a:cs typeface="Noto Sans KR W800"/>
+              </a:rPr>
+              <a:t>보이나요?</a:t>
+            </a:r>
+          </a:p>
+        </p:txBody>
+      </p:sp>
+      <p:sp>
+        <p:nvSpPr>
+          <p:cNvPr id="20" name="10_B01프레임"/>
+          <p:cNvSpPr/>
+          <p:nvPr/>
+        </p:nvSpPr>
+        <p:spPr>
+          <a:xfrm>
+            <a:off x="323850" y="323850"/>
+            <a:ext cx="9639300" cy="12211050"/>
+          </a:xfrm>
+          <a:prstGeom prst="roundRect">
+            <a:avLst>
+              <a:gd name="adj" fmla="val 2766"/>
+            </a:avLst>
+          </a:prstGeom>
+          <a:noFill/>
+          <a:ln w="19050">
+            <a:solidFill>
+              <a:srgbClr val="D0DCE5"/>
+            </a:solidFill>
+          </a:ln>
+          <a:effectLst/>
+        </p:spPr>
+        <p:txBody>
+          <a:bodyPr rtlCol="0" anchor="ctr"/>
+          <a:lstStyle/>
+          <a:p>
+            <a:pPr algn="ctr"/>
+          </a:p>
+        </p:txBody>
+      </p:sp>
+    </p:spTree>
+  </p:cSld>
+  <p:clrMapOvr>
+    <a:masterClrMapping/>
+  </p:clrMapOvr>
+</p:sld>
+</file>
+
+<file path=ppt/slides/slide11.xml><?xml version="1.0" encoding="utf-8"?>
+<p:sld xmlns:a="http://schemas.openxmlformats.org/drawingml/2006/main" xmlns:p="http://schemas.openxmlformats.org/presentationml/2006/main" xmlns:r="http://schemas.openxmlformats.org/officeDocument/2006/relationships">
+  <p:cSld>
+    <p:bg>
+      <p:bgPr>
+        <a:solidFill>
+          <a:srgbClr val="FFFFFF"/>
+        </a:solidFill>
+        <a:effectLst/>
+      </p:bgPr>
+    </p:bg>
+    <p:spTree>
+      <p:nvGrpSpPr>
+        <p:cNvPr id="1" name=""/>
+        <p:cNvGrpSpPr/>
+        <p:nvPr/>
+      </p:nvGrpSpPr>
+      <p:grpSpPr/>
+      <p:sp>
+        <p:nvSpPr>
+          <p:cNvPr id="2" name="11_구간막대_1"/>
+          <p:cNvSpPr/>
+          <p:nvPr/>
+        </p:nvSpPr>
+        <p:spPr>
+          <a:xfrm>
+            <a:off x="914400" y="3444180"/>
+            <a:ext cx="4210050" cy="800100"/>
+          </a:xfrm>
+          <a:prstGeom prst="roundRect">
+            <a:avLst>
+              <a:gd name="adj" fmla="val 0"/>
+            </a:avLst>
+          </a:prstGeom>
+          <a:solidFill>
+            <a:srgbClr val="121416"/>
           </a:solidFill>
           <a:ln>
             <a:noFill/>
@@ -3135,65 +4521,73 @@
           </a:p>
         </p:txBody>
       </p:sp>
-      <p:pic>
-        <p:nvPicPr>
-          <p:cNvPr id="3" name="01_도식" descr="c01-pic1.png"/>
-          <p:cNvPicPr>
-            <a:picLocks noChangeAspect="1"/>
-          </p:cNvPicPr>
-          <p:nvPr/>
-        </p:nvPicPr>
-        <p:blipFill>
-          <a:blip r:embed="rId2"/>
-          <a:stretch>
-            <a:fillRect/>
-          </a:stretch>
-        </p:blipFill>
-        <p:spPr>
-          <a:xfrm>
-            <a:off x="914400" y="3463826"/>
-            <a:ext cx="8458200" cy="4953000"/>
-          </a:xfrm>
-          <a:prstGeom prst="rect">
-            <a:avLst/>
-          </a:prstGeom>
-        </p:spPr>
-      </p:pic>
-      <p:sp>
-        <p:nvSpPr>
-          <p:cNvPr id="4" name="01_headline_01"/>
-          <p:cNvSpPr txBox="1"/>
-          <p:nvPr/>
-        </p:nvSpPr>
-        <p:spPr>
-          <a:xfrm>
-            <a:off x="552152" y="988314"/>
-            <a:ext cx="9182695" cy="1089660"/>
-          </a:xfrm>
-          <a:prstGeom prst="rect">
-            <a:avLst/>
-          </a:prstGeom>
-          <a:noFill/>
-        </p:spPr>
-        <p:txBody>
-          <a:bodyPr wrap="none" lIns="0" rIns="0" tIns="0" bIns="0" anchor="t">
-            <a:noAutofit/>
-          </a:bodyPr>
-          <a:lstStyle/>
-          <a:p>
-            <a:pPr algn="ctr">
-              <a:lnSpc>
-                <a:spcPct val="100000"/>
-              </a:lnSpc>
-              <a:spcBef>
-                <a:spcPts val="0"/>
-              </a:spcBef>
-              <a:spcAft>
-                <a:spcPts val="0"/>
-              </a:spcAft>
-            </a:pPr>
-            <a:r>
-              <a:rPr sz="6600" b="0" i="0" spc="-231" lang="ko-KR" altLang="en-US">
+      <p:sp>
+        <p:nvSpPr>
+          <p:cNvPr id="3" name="11_구간막대_2"/>
+          <p:cNvSpPr/>
+          <p:nvPr/>
+        </p:nvSpPr>
+        <p:spPr>
+          <a:xfrm>
+            <a:off x="5162550" y="3444180"/>
+            <a:ext cx="4210050" cy="800100"/>
+          </a:xfrm>
+          <a:prstGeom prst="roundRect">
+            <a:avLst>
+              <a:gd name="adj" fmla="val 0"/>
+            </a:avLst>
+          </a:prstGeom>
+          <a:solidFill>
+            <a:srgbClr val="0879D8"/>
+          </a:solidFill>
+          <a:ln>
+            <a:noFill/>
+          </a:ln>
+          <a:effectLst/>
+        </p:spPr>
+        <p:txBody>
+          <a:bodyPr rtlCol="0" anchor="ctr"/>
+          <a:lstStyle/>
+          <a:p>
+            <a:pPr algn="ctr"/>
+          </a:p>
+        </p:txBody>
+      </p:sp>
+      <p:sp>
+        <p:nvSpPr>
+          <p:cNvPr id="4" name="11_headline_01"/>
+          <p:cNvSpPr txBox="1"/>
+          <p:nvPr/>
+        </p:nvSpPr>
+        <p:spPr>
+          <a:xfrm>
+            <a:off x="1511647" y="997077"/>
+            <a:ext cx="7263705" cy="1040130"/>
+          </a:xfrm>
+          <a:prstGeom prst="rect">
+            <a:avLst/>
+          </a:prstGeom>
+          <a:noFill/>
+        </p:spPr>
+        <p:txBody>
+          <a:bodyPr wrap="none" lIns="0" rIns="0" tIns="0" bIns="0" anchor="t">
+            <a:noAutofit/>
+          </a:bodyPr>
+          <a:lstStyle/>
+          <a:p>
+            <a:pPr algn="ctr">
+              <a:lnSpc>
+                <a:spcPct val="100000"/>
+              </a:lnSpc>
+              <a:spcBef>
+                <a:spcPts val="0"/>
+              </a:spcBef>
+              <a:spcAft>
+                <a:spcPts val="0"/>
+              </a:spcAft>
+            </a:pPr>
+            <a:r>
+              <a:rPr sz="6300" b="0" i="0" spc="-220" lang="ko-KR" altLang="en-US">
                 <a:solidFill>
                   <a:srgbClr val="121416"/>
                 </a:solidFill>
@@ -3201,46 +4595,46 @@
                 <a:ea typeface="Noto Sans KR W850"/>
                 <a:cs typeface="Noto Sans KR W850"/>
               </a:rPr>
-              <a:t>스쿼트 vs 레그 익스텐션,</a:t>
-            </a:r>
-          </a:p>
-        </p:txBody>
-      </p:sp>
-      <p:sp>
-        <p:nvSpPr>
-          <p:cNvPr id="5" name="01_headline_02"/>
-          <p:cNvSpPr txBox="1"/>
-          <p:nvPr/>
-        </p:nvSpPr>
-        <p:spPr>
-          <a:xfrm>
-            <a:off x="1278880" y="1977277"/>
-            <a:ext cx="7729240" cy="1089660"/>
-          </a:xfrm>
-          <a:prstGeom prst="rect">
-            <a:avLst/>
-          </a:prstGeom>
-          <a:noFill/>
-        </p:spPr>
-        <p:txBody>
-          <a:bodyPr wrap="none" lIns="0" rIns="0" tIns="0" bIns="0" anchor="t">
-            <a:noAutofit/>
-          </a:bodyPr>
-          <a:lstStyle/>
-          <a:p>
-            <a:pPr algn="ctr">
-              <a:lnSpc>
-                <a:spcPct val="100000"/>
-              </a:lnSpc>
-              <a:spcBef>
-                <a:spcPts val="0"/>
-              </a:spcBef>
-              <a:spcAft>
-                <a:spcPts val="0"/>
-              </a:spcAft>
-            </a:pPr>
-            <a:r>
-              <a:rPr sz="6600" b="0" i="0" spc="-231" lang="ko-KR" altLang="en-US">
+              <a:t>무릎 앞이 아픈 러너,</a:t>
+            </a:r>
+          </a:p>
+        </p:txBody>
+      </p:sp>
+      <p:sp>
+        <p:nvSpPr>
+          <p:cNvPr id="5" name="11_headline_02"/>
+          <p:cNvSpPr txBox="1"/>
+          <p:nvPr/>
+        </p:nvSpPr>
+        <p:spPr>
+          <a:xfrm>
+            <a:off x="1832074" y="1957167"/>
+            <a:ext cx="6622852" cy="1040130"/>
+          </a:xfrm>
+          <a:prstGeom prst="rect">
+            <a:avLst/>
+          </a:prstGeom>
+          <a:noFill/>
+        </p:spPr>
+        <p:txBody>
+          <a:bodyPr wrap="none" lIns="0" rIns="0" tIns="0" bIns="0" anchor="t">
+            <a:noAutofit/>
+          </a:bodyPr>
+          <a:lstStyle/>
+          <a:p>
+            <a:pPr algn="ctr">
+              <a:lnSpc>
+                <a:spcPct val="100000"/>
+              </a:lnSpc>
+              <a:spcBef>
+                <a:spcPts val="0"/>
+              </a:spcBef>
+              <a:spcAft>
+                <a:spcPts val="0"/>
+              </a:spcAft>
+            </a:pPr>
+            <a:r>
+              <a:rPr sz="6300" b="0" i="0" spc="-220" lang="ko-KR" altLang="en-US">
                 <a:solidFill>
                   <a:srgbClr val="0879D8"/>
                 </a:solidFill>
@@ -3248,10 +4642,10 @@
                 <a:ea typeface="Noto Sans KR W850"/>
                 <a:cs typeface="Noto Sans KR W850"/>
               </a:rPr>
-              <a:t>무릎</a:t>
-            </a:r>
-            <a:r>
-              <a:rPr sz="6600" b="0" i="0" spc="-231" lang="ko-KR" altLang="en-US">
+              <a:t>이렇게 시작</a:t>
+            </a:r>
+            <a:r>
+              <a:rPr sz="6300" b="0" i="0" spc="-220" lang="ko-KR" altLang="en-US">
                 <a:solidFill>
                   <a:srgbClr val="121416"/>
                 </a:solidFill>
@@ -3259,21 +4653,256 @@
                 <a:ea typeface="Noto Sans KR W850"/>
                 <a:cs typeface="Noto Sans KR W850"/>
               </a:rPr>
-              <a:t>에 덜 부담인 건?</a:t>
-            </a:r>
-          </a:p>
-        </p:txBody>
-      </p:sp>
-      <p:sp>
-        <p:nvSpPr>
-          <p:cNvPr id="6" name="01_lead_03"/>
-          <p:cNvSpPr txBox="1"/>
-          <p:nvPr/>
-        </p:nvSpPr>
-        <p:spPr>
-          <a:xfrm>
-            <a:off x="2352973" y="9035570"/>
-            <a:ext cx="5580906" cy="594360"/>
+              <a:t>합니다</a:t>
+            </a:r>
+          </a:p>
+        </p:txBody>
+      </p:sp>
+      <p:sp>
+        <p:nvSpPr>
+          <p:cNvPr id="6" name="11_div_03"/>
+          <p:cNvSpPr txBox="1"/>
+          <p:nvPr/>
+        </p:nvSpPr>
+        <p:spPr>
+          <a:xfrm>
+            <a:off x="1707952" y="3623250"/>
+            <a:ext cx="2622798" cy="495300"/>
+          </a:xfrm>
+          <a:prstGeom prst="rect">
+            <a:avLst/>
+          </a:prstGeom>
+          <a:noFill/>
+        </p:spPr>
+        <p:txBody>
+          <a:bodyPr wrap="none" lIns="0" rIns="0" tIns="0" bIns="0" anchor="t">
+            <a:noAutofit/>
+          </a:bodyPr>
+          <a:lstStyle/>
+          <a:p>
+            <a:pPr algn="ctr">
+              <a:lnSpc>
+                <a:spcPct val="100000"/>
+              </a:lnSpc>
+              <a:spcBef>
+                <a:spcPts val="0"/>
+              </a:spcBef>
+              <a:spcAft>
+                <a:spcPts val="0"/>
+              </a:spcAft>
+            </a:pPr>
+            <a:r>
+              <a:rPr sz="3000" b="0" i="0" spc="-60" lang="ko-KR" altLang="en-US">
+                <a:solidFill>
+                  <a:srgbClr val="FFFFFF"/>
+                </a:solidFill>
+                <a:latin typeface="Noto Sans KR W800"/>
+                <a:ea typeface="Noto Sans KR W800"/>
+                <a:cs typeface="Noto Sans KR W800"/>
+              </a:rPr>
+              <a:t>CKC 스쿼트</a:t>
+            </a:r>
+          </a:p>
+        </p:txBody>
+      </p:sp>
+      <p:sp>
+        <p:nvSpPr>
+          <p:cNvPr id="7" name="11_div_04"/>
+          <p:cNvSpPr txBox="1"/>
+          <p:nvPr/>
+        </p:nvSpPr>
+        <p:spPr>
+          <a:xfrm>
+            <a:off x="5713065" y="3623250"/>
+            <a:ext cx="3108871" cy="495300"/>
+          </a:xfrm>
+          <a:prstGeom prst="rect">
+            <a:avLst/>
+          </a:prstGeom>
+          <a:noFill/>
+        </p:spPr>
+        <p:txBody>
+          <a:bodyPr wrap="none" lIns="0" rIns="0" tIns="0" bIns="0" anchor="t">
+            <a:noAutofit/>
+          </a:bodyPr>
+          <a:lstStyle/>
+          <a:p>
+            <a:pPr algn="ctr">
+              <a:lnSpc>
+                <a:spcPct val="100000"/>
+              </a:lnSpc>
+              <a:spcBef>
+                <a:spcPts val="0"/>
+              </a:spcBef>
+              <a:spcAft>
+                <a:spcPts val="0"/>
+              </a:spcAft>
+            </a:pPr>
+            <a:r>
+              <a:rPr sz="3000" b="0" i="0" spc="-60" lang="ko-KR" altLang="en-US">
+                <a:solidFill>
+                  <a:srgbClr val="FFFFFF"/>
+                </a:solidFill>
+                <a:latin typeface="Noto Sans KR W800"/>
+                <a:ea typeface="Noto Sans KR W800"/>
+                <a:cs typeface="Noto Sans KR W800"/>
+              </a:rPr>
+              <a:t>OKC 발목 중량</a:t>
+            </a:r>
+          </a:p>
+        </p:txBody>
+      </p:sp>
+      <p:sp>
+        <p:nvSpPr>
+          <p:cNvPr id="8" name="11_span_05"/>
+          <p:cNvSpPr txBox="1"/>
+          <p:nvPr/>
+        </p:nvSpPr>
+        <p:spPr>
+          <a:xfrm>
+            <a:off x="533400" y="4365057"/>
+            <a:ext cx="1077516" cy="421005"/>
+          </a:xfrm>
+          <a:prstGeom prst="rect">
+            <a:avLst/>
+          </a:prstGeom>
+          <a:noFill/>
+        </p:spPr>
+        <p:txBody>
+          <a:bodyPr wrap="none" lIns="0" rIns="0" tIns="0" bIns="0" anchor="t">
+            <a:noAutofit/>
+          </a:bodyPr>
+          <a:lstStyle/>
+          <a:p>
+            <a:pPr algn="ctr">
+              <a:lnSpc>
+                <a:spcPct val="100000"/>
+              </a:lnSpc>
+              <a:spcBef>
+                <a:spcPts val="0"/>
+              </a:spcBef>
+              <a:spcAft>
+                <a:spcPts val="0"/>
+              </a:spcAft>
+            </a:pPr>
+            <a:r>
+              <a:rPr sz="2550" b="0" i="0" spc="0" lang="ko-KR" altLang="en-US">
+                <a:solidFill>
+                  <a:srgbClr val="5E6570"/>
+                </a:solidFill>
+                <a:latin typeface="Noto Sans KR W600"/>
+                <a:ea typeface="Noto Sans KR W600"/>
+                <a:cs typeface="Noto Sans KR W600"/>
+              </a:rPr>
+              <a:t>0°</a:t>
+            </a:r>
+          </a:p>
+        </p:txBody>
+      </p:sp>
+      <p:sp>
+        <p:nvSpPr>
+          <p:cNvPr id="9" name="11_span_06"/>
+          <p:cNvSpPr txBox="1"/>
+          <p:nvPr/>
+        </p:nvSpPr>
+        <p:spPr>
+          <a:xfrm>
+            <a:off x="4416921" y="4365057"/>
+            <a:ext cx="1265337" cy="421005"/>
+          </a:xfrm>
+          <a:prstGeom prst="rect">
+            <a:avLst/>
+          </a:prstGeom>
+          <a:noFill/>
+        </p:spPr>
+        <p:txBody>
+          <a:bodyPr wrap="none" lIns="0" rIns="0" tIns="0" bIns="0" anchor="t">
+            <a:noAutofit/>
+          </a:bodyPr>
+          <a:lstStyle/>
+          <a:p>
+            <a:pPr algn="ctr">
+              <a:lnSpc>
+                <a:spcPct val="100000"/>
+              </a:lnSpc>
+              <a:spcBef>
+                <a:spcPts val="0"/>
+              </a:spcBef>
+              <a:spcAft>
+                <a:spcPts val="0"/>
+              </a:spcAft>
+            </a:pPr>
+            <a:r>
+              <a:rPr sz="2550" b="0" i="0" spc="0" lang="ko-KR" altLang="en-US">
+                <a:solidFill>
+                  <a:srgbClr val="5E6570"/>
+                </a:solidFill>
+                <a:latin typeface="Noto Sans KR W600"/>
+                <a:ea typeface="Noto Sans KR W600"/>
+                <a:cs typeface="Noto Sans KR W600"/>
+              </a:rPr>
+              <a:t>45°</a:t>
+            </a:r>
+          </a:p>
+        </p:txBody>
+      </p:sp>
+      <p:sp>
+        <p:nvSpPr>
+          <p:cNvPr id="10" name="11_span_07"/>
+          <p:cNvSpPr txBox="1"/>
+          <p:nvPr/>
+        </p:nvSpPr>
+        <p:spPr>
+          <a:xfrm>
+            <a:off x="8488263" y="4365057"/>
+            <a:ext cx="1265337" cy="421005"/>
+          </a:xfrm>
+          <a:prstGeom prst="rect">
+            <a:avLst/>
+          </a:prstGeom>
+          <a:noFill/>
+        </p:spPr>
+        <p:txBody>
+          <a:bodyPr wrap="none" lIns="0" rIns="0" tIns="0" bIns="0" anchor="t">
+            <a:noAutofit/>
+          </a:bodyPr>
+          <a:lstStyle/>
+          <a:p>
+            <a:pPr algn="ctr">
+              <a:lnSpc>
+                <a:spcPct val="100000"/>
+              </a:lnSpc>
+              <a:spcBef>
+                <a:spcPts val="0"/>
+              </a:spcBef>
+              <a:spcAft>
+                <a:spcPts val="0"/>
+              </a:spcAft>
+            </a:pPr>
+            <a:r>
+              <a:rPr sz="2550" b="0" i="0" spc="0" lang="ko-KR" altLang="en-US">
+                <a:solidFill>
+                  <a:srgbClr val="5E6570"/>
+                </a:solidFill>
+                <a:latin typeface="Noto Sans KR W600"/>
+                <a:ea typeface="Noto Sans KR W600"/>
+                <a:cs typeface="Noto Sans KR W600"/>
+              </a:rPr>
+              <a:t>90°</a:t>
+            </a:r>
+          </a:p>
+        </p:txBody>
+      </p:sp>
+      <p:sp>
+        <p:nvSpPr>
+          <p:cNvPr id="11" name="11_item-h_08"/>
+          <p:cNvSpPr txBox="1"/>
+          <p:nvPr/>
+        </p:nvSpPr>
+        <p:spPr>
+          <a:xfrm>
+            <a:off x="3662065" y="5348799"/>
+            <a:ext cx="2962870" cy="594360"/>
           </a:xfrm>
           <a:prstGeom prst="rect">
             <a:avLst/>
@@ -3302,112 +4931,347 @@
                 <a:solidFill>
                   <a:srgbClr val="121416"/>
                 </a:solidFill>
-                <a:latin typeface="Noto Sans KR W700"/>
-                <a:ea typeface="Noto Sans KR W700"/>
-                <a:cs typeface="Noto Sans KR W700"/>
-              </a:rPr>
-              <a:t>정답은 운동 이름이 아니라</a:t>
-            </a:r>
-          </a:p>
-        </p:txBody>
-      </p:sp>
-      <p:sp>
-        <p:nvSpPr>
-          <p:cNvPr id="7" name="01_lead_04"/>
-          <p:cNvSpPr txBox="1"/>
-          <p:nvPr/>
-        </p:nvSpPr>
-        <p:spPr>
-          <a:xfrm>
-            <a:off x="2681585" y="9675531"/>
-            <a:ext cx="4923532" cy="594360"/>
-          </a:xfrm>
-          <a:prstGeom prst="rect">
-            <a:avLst/>
-          </a:prstGeom>
-          <a:noFill/>
-        </p:spPr>
-        <p:txBody>
-          <a:bodyPr wrap="none" lIns="0" rIns="0" tIns="0" bIns="0" anchor="t">
-            <a:noAutofit/>
-          </a:bodyPr>
-          <a:lstStyle/>
-          <a:p>
-            <a:pPr algn="ctr">
-              <a:lnSpc>
-                <a:spcPct val="100000"/>
-              </a:lnSpc>
-              <a:spcBef>
-                <a:spcPts val="0"/>
-              </a:spcBef>
-              <a:spcAft>
-                <a:spcPts val="0"/>
-              </a:spcAft>
-            </a:pPr>
-            <a:r>
-              <a:rPr sz="3600" b="0" i="0" spc="-108" lang="ko-KR" altLang="en-US">
+                <a:latin typeface="Noto Sans KR W800"/>
+                <a:ea typeface="Noto Sans KR W800"/>
+                <a:cs typeface="Noto Sans KR W800"/>
+              </a:rPr>
+              <a:t>얕게는 CKC</a:t>
+            </a:r>
+          </a:p>
+        </p:txBody>
+      </p:sp>
+      <p:sp>
+        <p:nvSpPr>
+          <p:cNvPr id="12" name="11_body_09"/>
+          <p:cNvSpPr txBox="1"/>
+          <p:nvPr/>
+        </p:nvSpPr>
+        <p:spPr>
+          <a:xfrm>
+            <a:off x="2175123" y="6037558"/>
+            <a:ext cx="5936754" cy="544830"/>
+          </a:xfrm>
+          <a:prstGeom prst="rect">
+            <a:avLst/>
+          </a:prstGeom>
+          <a:noFill/>
+        </p:spPr>
+        <p:txBody>
+          <a:bodyPr wrap="none" lIns="0" rIns="0" tIns="0" bIns="0" anchor="t">
+            <a:noAutofit/>
+          </a:bodyPr>
+          <a:lstStyle/>
+          <a:p>
+            <a:pPr algn="ctr">
+              <a:lnSpc>
+                <a:spcPct val="100000"/>
+              </a:lnSpc>
+              <a:spcBef>
+                <a:spcPts val="0"/>
+              </a:spcBef>
+              <a:spcAft>
+                <a:spcPts val="0"/>
+              </a:spcAft>
+            </a:pPr>
+            <a:r>
+              <a:rPr sz="3300" b="0" i="0" spc="-66" lang="ko-KR" altLang="en-US">
                 <a:solidFill>
                   <a:srgbClr val="121416"/>
-                </a:solidFill>
-                <a:latin typeface="Noto Sans KR W700"/>
-                <a:ea typeface="Noto Sans KR W700"/>
-                <a:cs typeface="Noto Sans KR W700"/>
-              </a:rPr>
-              <a:t>‘무릎 각도’에 있습니다</a:t>
-            </a:r>
-          </a:p>
-        </p:txBody>
-      </p:sp>
-      <p:sp>
-        <p:nvSpPr>
-          <p:cNvPr id="8" name="01_note_05"/>
-          <p:cNvSpPr txBox="1"/>
-          <p:nvPr/>
-        </p:nvSpPr>
-        <p:spPr>
-          <a:xfrm>
-            <a:off x="1758851" y="10522756"/>
-            <a:ext cx="6769298" cy="445770"/>
-          </a:xfrm>
-          <a:prstGeom prst="rect">
-            <a:avLst/>
-          </a:prstGeom>
-          <a:noFill/>
-        </p:spPr>
-        <p:txBody>
-          <a:bodyPr wrap="none" lIns="0" rIns="0" tIns="0" bIns="0" anchor="t">
-            <a:noAutofit/>
-          </a:bodyPr>
-          <a:lstStyle/>
-          <a:p>
-            <a:pPr algn="ctr">
-              <a:lnSpc>
-                <a:spcPct val="100000"/>
-              </a:lnSpc>
-              <a:spcBef>
-                <a:spcPts val="0"/>
-              </a:spcBef>
-              <a:spcAft>
-                <a:spcPts val="0"/>
-              </a:spcAft>
-            </a:pPr>
-            <a:r>
-              <a:rPr sz="2700" b="0" i="0" spc="-54" lang="ko-KR" altLang="en-US">
-                <a:solidFill>
-                  <a:srgbClr val="5E6570"/>
                 </a:solidFill>
                 <a:latin typeface="Noto Sans KR W500"/>
                 <a:ea typeface="Noto Sans KR W500"/>
                 <a:cs typeface="Noto Sans KR W500"/>
               </a:rPr>
-              <a:t>PFP 2탄 · 1탄 ‘러너의 무릎 앞 통증’ 이어서</a:t>
-            </a:r>
-          </a:p>
-        </p:txBody>
-      </p:sp>
-      <p:sp>
-        <p:nvSpPr>
-          <p:cNvPr id="9" name="01_B01프레임"/>
+              <a:t>스쿼트는 무릎 0~45° 범위에서</a:t>
+            </a:r>
+          </a:p>
+        </p:txBody>
+      </p:sp>
+      <p:sp>
+        <p:nvSpPr>
+          <p:cNvPr id="13" name="11_item-h_10"/>
+          <p:cNvSpPr txBox="1"/>
+          <p:nvPr/>
+        </p:nvSpPr>
+        <p:spPr>
+          <a:xfrm>
+            <a:off x="3635425" y="7014335"/>
+            <a:ext cx="3016002" cy="594360"/>
+          </a:xfrm>
+          <a:prstGeom prst="rect">
+            <a:avLst/>
+          </a:prstGeom>
+          <a:noFill/>
+        </p:spPr>
+        <p:txBody>
+          <a:bodyPr wrap="none" lIns="0" rIns="0" tIns="0" bIns="0" anchor="t">
+            <a:noAutofit/>
+          </a:bodyPr>
+          <a:lstStyle/>
+          <a:p>
+            <a:pPr algn="ctr">
+              <a:lnSpc>
+                <a:spcPct val="100000"/>
+              </a:lnSpc>
+              <a:spcBef>
+                <a:spcPts val="0"/>
+              </a:spcBef>
+              <a:spcAft>
+                <a:spcPts val="0"/>
+              </a:spcAft>
+            </a:pPr>
+            <a:r>
+              <a:rPr sz="3600" b="0" i="0" spc="-108" lang="ko-KR" altLang="en-US">
+                <a:solidFill>
+                  <a:srgbClr val="121416"/>
+                </a:solidFill>
+                <a:latin typeface="Noto Sans KR W800"/>
+                <a:ea typeface="Noto Sans KR W800"/>
+                <a:cs typeface="Noto Sans KR W800"/>
+              </a:rPr>
+              <a:t>깊게는 OKC</a:t>
+            </a:r>
+          </a:p>
+        </p:txBody>
+      </p:sp>
+      <p:sp>
+        <p:nvSpPr>
+          <p:cNvPr id="14" name="11_body_11"/>
+          <p:cNvSpPr txBox="1"/>
+          <p:nvPr/>
+        </p:nvSpPr>
+        <p:spPr>
+          <a:xfrm>
+            <a:off x="1816745" y="7703094"/>
+            <a:ext cx="6653361" cy="544830"/>
+          </a:xfrm>
+          <a:prstGeom prst="rect">
+            <a:avLst/>
+          </a:prstGeom>
+          <a:noFill/>
+        </p:spPr>
+        <p:txBody>
+          <a:bodyPr wrap="none" lIns="0" rIns="0" tIns="0" bIns="0" anchor="t">
+            <a:noAutofit/>
+          </a:bodyPr>
+          <a:lstStyle/>
+          <a:p>
+            <a:pPr algn="ctr">
+              <a:lnSpc>
+                <a:spcPct val="100000"/>
+              </a:lnSpc>
+              <a:spcBef>
+                <a:spcPts val="0"/>
+              </a:spcBef>
+              <a:spcAft>
+                <a:spcPts val="0"/>
+              </a:spcAft>
+            </a:pPr>
+            <a:r>
+              <a:rPr sz="3300" b="0" i="0" spc="-66" lang="ko-KR" altLang="en-US">
+                <a:solidFill>
+                  <a:srgbClr val="121416"/>
+                </a:solidFill>
+                <a:latin typeface="Noto Sans KR W500"/>
+                <a:ea typeface="Noto Sans KR W500"/>
+                <a:cs typeface="Noto Sans KR W500"/>
+              </a:rPr>
+              <a:t>발목 중량 무릎 펴기는 90~45°에서</a:t>
+            </a:r>
+          </a:p>
+        </p:txBody>
+      </p:sp>
+      <p:sp>
+        <p:nvSpPr>
+          <p:cNvPr id="15" name="11_item-h_12"/>
+          <p:cNvSpPr txBox="1"/>
+          <p:nvPr/>
+        </p:nvSpPr>
+        <p:spPr>
+          <a:xfrm>
+            <a:off x="3427363" y="8679871"/>
+            <a:ext cx="3432125" cy="594360"/>
+          </a:xfrm>
+          <a:prstGeom prst="rect">
+            <a:avLst/>
+          </a:prstGeom>
+          <a:noFill/>
+        </p:spPr>
+        <p:txBody>
+          <a:bodyPr wrap="none" lIns="0" rIns="0" tIns="0" bIns="0" anchor="t">
+            <a:noAutofit/>
+          </a:bodyPr>
+          <a:lstStyle/>
+          <a:p>
+            <a:pPr algn="ctr">
+              <a:lnSpc>
+                <a:spcPct val="100000"/>
+              </a:lnSpc>
+              <a:spcBef>
+                <a:spcPts val="0"/>
+              </a:spcBef>
+              <a:spcAft>
+                <a:spcPts val="0"/>
+              </a:spcAft>
+            </a:pPr>
+            <a:r>
+              <a:rPr sz="3600" b="0" i="0" spc="-108" lang="ko-KR" altLang="en-US">
+                <a:solidFill>
+                  <a:srgbClr val="121416"/>
+                </a:solidFill>
+                <a:latin typeface="Noto Sans KR W800"/>
+                <a:ea typeface="Noto Sans KR W800"/>
+                <a:cs typeface="Noto Sans KR W800"/>
+              </a:rPr>
+              <a:t>조절은 한 발로</a:t>
+            </a:r>
+          </a:p>
+        </p:txBody>
+      </p:sp>
+      <p:sp>
+        <p:nvSpPr>
+          <p:cNvPr id="16" name="11_body_13"/>
+          <p:cNvSpPr txBox="1"/>
+          <p:nvPr/>
+        </p:nvSpPr>
+        <p:spPr>
+          <a:xfrm>
+            <a:off x="1598712" y="9368629"/>
+            <a:ext cx="7089577" cy="544830"/>
+          </a:xfrm>
+          <a:prstGeom prst="rect">
+            <a:avLst/>
+          </a:prstGeom>
+          <a:noFill/>
+        </p:spPr>
+        <p:txBody>
+          <a:bodyPr wrap="none" lIns="0" rIns="0" tIns="0" bIns="0" anchor="t">
+            <a:noAutofit/>
+          </a:bodyPr>
+          <a:lstStyle/>
+          <a:p>
+            <a:pPr algn="ctr">
+              <a:lnSpc>
+                <a:spcPct val="100000"/>
+              </a:lnSpc>
+              <a:spcBef>
+                <a:spcPts val="0"/>
+              </a:spcBef>
+              <a:spcAft>
+                <a:spcPts val="0"/>
+              </a:spcAft>
+            </a:pPr>
+            <a:r>
+              <a:rPr sz="3300" b="0" i="0" spc="-66" lang="ko-KR" altLang="en-US">
+                <a:solidFill>
+                  <a:srgbClr val="121416"/>
+                </a:solidFill>
+                <a:latin typeface="Noto Sans KR W500"/>
+                <a:ea typeface="Noto Sans KR W500"/>
+                <a:cs typeface="Noto Sans KR W500"/>
+              </a:rPr>
+              <a:t>싱글 레그 데드리프트, 옆·앞에서 확인</a:t>
+            </a:r>
+          </a:p>
+        </p:txBody>
+      </p:sp>
+      <p:sp>
+        <p:nvSpPr>
+          <p:cNvPr id="17" name="11_safety_14"/>
+          <p:cNvSpPr txBox="1"/>
+          <p:nvPr/>
+        </p:nvSpPr>
+        <p:spPr>
+          <a:xfrm>
+            <a:off x="1717477" y="10457420"/>
+            <a:ext cx="6852047" cy="445770"/>
+          </a:xfrm>
+          <a:prstGeom prst="rect">
+            <a:avLst/>
+          </a:prstGeom>
+          <a:noFill/>
+        </p:spPr>
+        <p:txBody>
+          <a:bodyPr wrap="none" lIns="0" rIns="0" tIns="0" bIns="0" anchor="t">
+            <a:noAutofit/>
+          </a:bodyPr>
+          <a:lstStyle/>
+          <a:p>
+            <a:pPr algn="ctr">
+              <a:lnSpc>
+                <a:spcPct val="100000"/>
+              </a:lnSpc>
+              <a:spcBef>
+                <a:spcPts val="0"/>
+              </a:spcBef>
+              <a:spcAft>
+                <a:spcPts val="0"/>
+              </a:spcAft>
+            </a:pPr>
+            <a:r>
+              <a:rPr sz="2700" b="0" i="0" spc="-54" lang="ko-KR" altLang="en-US">
+                <a:solidFill>
+                  <a:srgbClr val="121416"/>
+                </a:solidFill>
+                <a:latin typeface="Noto Sans KR W650"/>
+                <a:ea typeface="Noto Sans KR W650"/>
+                <a:cs typeface="Noto Sans KR W650"/>
+              </a:rPr>
+              <a:t>통증이 운동 중 커지거나 다음 날까지 남으면</a:t>
+            </a:r>
+          </a:p>
+        </p:txBody>
+      </p:sp>
+      <p:sp>
+        <p:nvSpPr>
+          <p:cNvPr id="18" name="11_safety_15"/>
+          <p:cNvSpPr txBox="1"/>
+          <p:nvPr/>
+        </p:nvSpPr>
+        <p:spPr>
+          <a:xfrm>
+            <a:off x="1247924" y="10944237"/>
+            <a:ext cx="7791152" cy="445770"/>
+          </a:xfrm>
+          <a:prstGeom prst="rect">
+            <a:avLst/>
+          </a:prstGeom>
+          <a:noFill/>
+        </p:spPr>
+        <p:txBody>
+          <a:bodyPr wrap="none" lIns="0" rIns="0" tIns="0" bIns="0" anchor="t">
+            <a:noAutofit/>
+          </a:bodyPr>
+          <a:lstStyle/>
+          <a:p>
+            <a:pPr algn="ctr">
+              <a:lnSpc>
+                <a:spcPct val="100000"/>
+              </a:lnSpc>
+              <a:spcBef>
+                <a:spcPts val="0"/>
+              </a:spcBef>
+              <a:spcAft>
+                <a:spcPts val="0"/>
+              </a:spcAft>
+            </a:pPr>
+            <a:r>
+              <a:rPr sz="2700" b="0" i="0" spc="-54" lang="ko-KR" altLang="en-US">
+                <a:solidFill>
+                  <a:srgbClr val="121416"/>
+                </a:solidFill>
+                <a:latin typeface="Noto Sans KR W650"/>
+                <a:ea typeface="Noto Sans KR W650"/>
+                <a:cs typeface="Noto Sans KR W650"/>
+              </a:rPr>
+              <a:t>범위와 무게를 줄이고 담당 트레이너와 조정하세요.</a:t>
+            </a:r>
+          </a:p>
+        </p:txBody>
+      </p:sp>
+      <p:sp>
+        <p:nvSpPr>
+          <p:cNvPr id="19" name="11_B01프레임"/>
           <p:cNvSpPr/>
           <p:nvPr/>
         </p:nvSpPr>
@@ -5571,25 +7435,28 @@
       <p:grpSpPr/>
       <p:sp>
         <p:nvSpPr>
-          <p:cNvPr id="2" name="06_그림배경_1"/>
+          <p:cNvPr id="2" name="06_사진영상자리_06-1"/>
           <p:cNvSpPr/>
           <p:nvPr/>
         </p:nvSpPr>
         <p:spPr>
           <a:xfrm>
-            <a:off x="914400" y="4767560"/>
-            <a:ext cx="8458200" cy="3143250"/>
+            <a:off x="1028700" y="3238500"/>
+            <a:ext cx="8229600" cy="4629150"/>
           </a:xfrm>
           <a:prstGeom prst="roundRect">
             <a:avLst>
-              <a:gd name="adj" fmla="val 7272"/>
+              <a:gd name="adj" fmla="val 0"/>
             </a:avLst>
           </a:prstGeom>
           <a:solidFill>
-            <a:srgbClr val="F0F7FC"/>
+            <a:srgbClr val="F3F5F7"/>
           </a:solidFill>
-          <a:ln>
-            <a:noFill/>
+          <a:ln w="28575">
+            <a:solidFill>
+              <a:srgbClr val="B9C4CF"/>
+            </a:solidFill>
+            <a:prstDash val="dash"/>
           </a:ln>
           <a:effectLst/>
         </p:spPr>
@@ -5601,40 +7468,16 @@
           </a:p>
         </p:txBody>
       </p:sp>
-      <p:pic>
-        <p:nvPicPr>
-          <p:cNvPr id="3" name="06_도식" descr="c06-pic1.png"/>
-          <p:cNvPicPr>
-            <a:picLocks noChangeAspect="1"/>
-          </p:cNvPicPr>
-          <p:nvPr/>
-        </p:nvPicPr>
-        <p:blipFill>
-          <a:blip r:embed="rId2"/>
-          <a:stretch>
-            <a:fillRect/>
-          </a:stretch>
-        </p:blipFill>
-        <p:spPr>
-          <a:xfrm>
-            <a:off x="914400" y="4767560"/>
-            <a:ext cx="8458200" cy="3143250"/>
-          </a:xfrm>
-          <a:prstGeom prst="rect">
-            <a:avLst/>
-          </a:prstGeom>
-        </p:spPr>
-      </p:pic>
-      <p:sp>
-        <p:nvSpPr>
-          <p:cNvPr id="4" name="06_headline_01"/>
-          <p:cNvSpPr txBox="1"/>
-          <p:nvPr/>
-        </p:nvSpPr>
-        <p:spPr>
-          <a:xfrm>
-            <a:off x="2540198" y="997077"/>
-            <a:ext cx="5206603" cy="1040130"/>
+      <p:sp>
+        <p:nvSpPr>
+          <p:cNvPr id="3" name="06_headline_01"/>
+          <p:cNvSpPr txBox="1"/>
+          <p:nvPr/>
+        </p:nvSpPr>
+        <p:spPr>
+          <a:xfrm>
+            <a:off x="3346252" y="997077"/>
+            <a:ext cx="3594497" cy="1040130"/>
           </a:xfrm>
           <a:prstGeom prst="rect">
             <a:avLst/>
@@ -5667,21 +7510,21 @@
                 <a:ea typeface="Noto Sans KR W850"/>
                 <a:cs typeface="Noto Sans KR W850"/>
               </a:rPr>
-              <a:t>움직임 패턴은</a:t>
-            </a:r>
-          </a:p>
-        </p:txBody>
-      </p:sp>
-      <p:sp>
-        <p:nvSpPr>
-          <p:cNvPr id="5" name="06_headline_02"/>
-          <p:cNvSpPr txBox="1"/>
-          <p:nvPr/>
-        </p:nvSpPr>
-        <p:spPr>
-          <a:xfrm>
-            <a:off x="2638127" y="1957167"/>
-            <a:ext cx="5010745" cy="1040130"/>
+              <a:t>스쿼트는</a:t>
+            </a:r>
+          </a:p>
+        </p:txBody>
+      </p:sp>
+      <p:sp>
+        <p:nvSpPr>
+          <p:cNvPr id="4" name="06_headline_02"/>
+          <p:cNvSpPr txBox="1"/>
+          <p:nvPr/>
+        </p:nvSpPr>
+        <p:spPr>
+          <a:xfrm>
+            <a:off x="2639764" y="1957167"/>
+            <a:ext cx="5007471" cy="1040130"/>
           </a:xfrm>
           <a:prstGeom prst="rect">
             <a:avLst/>
@@ -5714,7 +7557,7 @@
                 <a:ea typeface="Noto Sans KR W850"/>
                 <a:cs typeface="Noto Sans KR W850"/>
               </a:rPr>
-              <a:t>엉덩관절</a:t>
+              <a:t>무릎 45°</a:t>
             </a:r>
             <a:r>
               <a:rPr sz="6300" b="0" i="0" spc="-220" lang="ko-KR" altLang="en-US">
@@ -5725,93 +7568,328 @@
                 <a:ea typeface="Noto Sans KR W850"/>
                 <a:cs typeface="Noto Sans KR W850"/>
               </a:rPr>
-              <a:t>에서</a:t>
-            </a:r>
-          </a:p>
-        </p:txBody>
-      </p:sp>
-      <p:sp>
-        <p:nvSpPr>
-          <p:cNvPr id="6" name="06_body_03"/>
-          <p:cNvSpPr txBox="1"/>
-          <p:nvPr/>
-        </p:nvSpPr>
-        <p:spPr>
-          <a:xfrm>
-            <a:off x="2409230" y="3281112"/>
-            <a:ext cx="5468541" cy="544830"/>
-          </a:xfrm>
-          <a:prstGeom prst="rect">
-            <a:avLst/>
-          </a:prstGeom>
-          <a:noFill/>
-        </p:spPr>
-        <p:txBody>
-          <a:bodyPr wrap="none" lIns="0" rIns="0" tIns="0" bIns="0" anchor="t">
-            <a:noAutofit/>
-          </a:bodyPr>
-          <a:lstStyle/>
-          <a:p>
-            <a:pPr algn="ctr">
-              <a:lnSpc>
-                <a:spcPct val="100000"/>
-              </a:lnSpc>
-              <a:spcBef>
-                <a:spcPts val="0"/>
-              </a:spcBef>
-              <a:spcAft>
-                <a:spcPts val="0"/>
-              </a:spcAft>
-            </a:pPr>
-            <a:r>
-              <a:rPr sz="3300" b="0" i="0" spc="-66" lang="ko-KR" altLang="en-US">
+              <a:t>까지</a:t>
+            </a:r>
+          </a:p>
+        </p:txBody>
+      </p:sp>
+      <p:sp>
+        <p:nvSpPr>
+          <p:cNvPr id="5" name="06_g-tag_03"/>
+          <p:cNvSpPr txBox="1"/>
+          <p:nvPr/>
+        </p:nvSpPr>
+        <p:spPr>
+          <a:xfrm>
+            <a:off x="3835896" y="4810566"/>
+            <a:ext cx="2615208" cy="396240"/>
+          </a:xfrm>
+          <a:prstGeom prst="rect">
+            <a:avLst/>
+          </a:prstGeom>
+          <a:noFill/>
+        </p:spPr>
+        <p:txBody>
+          <a:bodyPr wrap="none" lIns="0" rIns="0" tIns="0" bIns="0" anchor="t">
+            <a:noAutofit/>
+          </a:bodyPr>
+          <a:lstStyle/>
+          <a:p>
+            <a:pPr algn="ctr">
+              <a:lnSpc>
+                <a:spcPct val="100000"/>
+              </a:lnSpc>
+              <a:spcBef>
+                <a:spcPts val="0"/>
+              </a:spcBef>
+              <a:spcAft>
+                <a:spcPts val="0"/>
+              </a:spcAft>
+            </a:pPr>
+            <a:r>
+              <a:rPr sz="2400" b="0" i="0" spc="0" lang="ko-KR" altLang="en-US">
+                <a:solidFill>
+                  <a:srgbClr val="0879D8"/>
+                </a:solidFill>
+                <a:latin typeface="Noto Sans KR W700"/>
+                <a:ea typeface="Noto Sans KR W700"/>
+                <a:cs typeface="Noto Sans KR W700"/>
+              </a:rPr>
+              <a:t>영상 넣는 자리</a:t>
+            </a:r>
+          </a:p>
+        </p:txBody>
+      </p:sp>
+      <p:sp>
+        <p:nvSpPr>
+          <p:cNvPr id="6" name="06_strong_04"/>
+          <p:cNvSpPr txBox="1"/>
+          <p:nvPr/>
+        </p:nvSpPr>
+        <p:spPr>
+          <a:xfrm>
+            <a:off x="3684240" y="5307390"/>
+            <a:ext cx="2918520" cy="495300"/>
+          </a:xfrm>
+          <a:prstGeom prst="rect">
+            <a:avLst/>
+          </a:prstGeom>
+          <a:noFill/>
+        </p:spPr>
+        <p:txBody>
+          <a:bodyPr wrap="none" lIns="0" rIns="0" tIns="0" bIns="0" anchor="t">
+            <a:noAutofit/>
+          </a:bodyPr>
+          <a:lstStyle/>
+          <a:p>
+            <a:pPr algn="ctr">
+              <a:lnSpc>
+                <a:spcPct val="100000"/>
+              </a:lnSpc>
+              <a:spcBef>
+                <a:spcPts val="0"/>
+              </a:spcBef>
+              <a:spcAft>
+                <a:spcPts val="0"/>
+              </a:spcAft>
+            </a:pPr>
+            <a:r>
+              <a:rPr sz="3000" b="0" i="0" spc="-60" lang="ko-KR" altLang="en-US">
                 <a:solidFill>
                   <a:srgbClr val="121416"/>
+                </a:solidFill>
+                <a:latin typeface="Noto Sans KR W800"/>
+                <a:ea typeface="Noto Sans KR W800"/>
+                <a:cs typeface="Noto Sans KR W800"/>
+              </a:rPr>
+              <a:t>스쿼트 옆모습</a:t>
+            </a:r>
+          </a:p>
+        </p:txBody>
+      </p:sp>
+      <p:sp>
+        <p:nvSpPr>
+          <p:cNvPr id="7" name="06_g-spec_05"/>
+          <p:cNvSpPr txBox="1"/>
+          <p:nvPr/>
+        </p:nvSpPr>
+        <p:spPr>
+          <a:xfrm>
+            <a:off x="3115419" y="5915466"/>
+            <a:ext cx="4056013" cy="396240"/>
+          </a:xfrm>
+          <a:prstGeom prst="rect">
+            <a:avLst/>
+          </a:prstGeom>
+          <a:noFill/>
+        </p:spPr>
+        <p:txBody>
+          <a:bodyPr wrap="none" lIns="0" rIns="0" tIns="0" bIns="0" anchor="t">
+            <a:noAutofit/>
+          </a:bodyPr>
+          <a:lstStyle/>
+          <a:p>
+            <a:pPr algn="ctr">
+              <a:lnSpc>
+                <a:spcPct val="100000"/>
+              </a:lnSpc>
+              <a:spcBef>
+                <a:spcPts val="0"/>
+              </a:spcBef>
+              <a:spcAft>
+                <a:spcPts val="0"/>
+              </a:spcAft>
+            </a:pPr>
+            <a:r>
+              <a:rPr sz="2400" b="0" i="0" spc="0" lang="ko-KR" altLang="en-US">
+                <a:solidFill>
+                  <a:srgbClr val="5E6570"/>
                 </a:solidFill>
                 <a:latin typeface="Noto Sans KR W500"/>
                 <a:ea typeface="Noto Sans KR W500"/>
                 <a:cs typeface="Noto Sans KR W500"/>
               </a:rPr>
-              <a:t>1탄에서 본 몸통 기울어짐과</a:t>
-            </a:r>
-          </a:p>
-        </p:txBody>
-      </p:sp>
-      <p:sp>
-        <p:nvSpPr>
-          <p:cNvPr id="7" name="06_body_04"/>
-          <p:cNvSpPr txBox="1"/>
-          <p:nvPr/>
-        </p:nvSpPr>
-        <p:spPr>
-          <a:xfrm>
-            <a:off x="2088803" y="3876127"/>
-            <a:ext cx="6109395" cy="544830"/>
-          </a:xfrm>
-          <a:prstGeom prst="rect">
-            <a:avLst/>
-          </a:prstGeom>
-          <a:noFill/>
-        </p:spPr>
-        <p:txBody>
-          <a:bodyPr wrap="none" lIns="0" rIns="0" tIns="0" bIns="0" anchor="t">
-            <a:noAutofit/>
-          </a:bodyPr>
-          <a:lstStyle/>
-          <a:p>
-            <a:pPr algn="ctr">
-              <a:lnSpc>
-                <a:spcPct val="100000"/>
-              </a:lnSpc>
-              <a:spcBef>
-                <a:spcPts val="0"/>
-              </a:spcBef>
-              <a:spcAft>
-                <a:spcPts val="0"/>
-              </a:spcAft>
-            </a:pPr>
-            <a:r>
-              <a:rPr sz="3300" b="0" i="0" spc="-66" lang="ko-KR" altLang="en-US">
+              <a:t>가로 16:9 · 무릎·발끝까지</a:t>
+            </a:r>
+          </a:p>
+        </p:txBody>
+      </p:sp>
+      <p:sp>
+        <p:nvSpPr>
+          <p:cNvPr id="8" name="06_abs_06"/>
+          <p:cNvSpPr txBox="1"/>
+          <p:nvPr/>
+        </p:nvSpPr>
+        <p:spPr>
+          <a:xfrm>
+            <a:off x="3052316" y="8221599"/>
+            <a:ext cx="4182368" cy="718185"/>
+          </a:xfrm>
+          <a:prstGeom prst="rect">
+            <a:avLst/>
+          </a:prstGeom>
+          <a:noFill/>
+        </p:spPr>
+        <p:txBody>
+          <a:bodyPr wrap="none" lIns="0" rIns="0" tIns="0" bIns="0" anchor="t">
+            <a:noAutofit/>
+          </a:bodyPr>
+          <a:lstStyle/>
+          <a:p>
+            <a:pPr algn="ctr">
+              <a:lnSpc>
+                <a:spcPct val="100000"/>
+              </a:lnSpc>
+              <a:spcBef>
+                <a:spcPts val="0"/>
+              </a:spcBef>
+              <a:spcAft>
+                <a:spcPts val="0"/>
+              </a:spcAft>
+            </a:pPr>
+            <a:r>
+              <a:rPr sz="4350" b="0" i="0" spc="-152" lang="ko-KR" altLang="en-US">
+                <a:solidFill>
+                  <a:srgbClr val="121416"/>
+                </a:solidFill>
+                <a:latin typeface="Noto Sans KR W850"/>
+                <a:ea typeface="Noto Sans KR W850"/>
+                <a:cs typeface="Noto Sans KR W850"/>
+              </a:rPr>
+              <a:t>무릎이 45°보다</a:t>
+            </a:r>
+          </a:p>
+        </p:txBody>
+      </p:sp>
+      <p:sp>
+        <p:nvSpPr>
+          <p:cNvPr id="9" name="06_abs_07"/>
+          <p:cNvSpPr txBox="1"/>
+          <p:nvPr/>
+        </p:nvSpPr>
+        <p:spPr>
+          <a:xfrm>
+            <a:off x="2534096" y="8906506"/>
+            <a:ext cx="5218658" cy="718185"/>
+          </a:xfrm>
+          <a:prstGeom prst="rect">
+            <a:avLst/>
+          </a:prstGeom>
+          <a:noFill/>
+        </p:spPr>
+        <p:txBody>
+          <a:bodyPr wrap="none" lIns="0" rIns="0" tIns="0" bIns="0" anchor="t">
+            <a:noAutofit/>
+          </a:bodyPr>
+          <a:lstStyle/>
+          <a:p>
+            <a:pPr algn="ctr">
+              <a:lnSpc>
+                <a:spcPct val="100000"/>
+              </a:lnSpc>
+              <a:spcBef>
+                <a:spcPts val="0"/>
+              </a:spcBef>
+              <a:spcAft>
+                <a:spcPts val="0"/>
+              </a:spcAft>
+            </a:pPr>
+            <a:r>
+              <a:rPr sz="4350" b="0" i="0" spc="-152" lang="ko-KR" altLang="en-US">
+                <a:solidFill>
+                  <a:srgbClr val="121416"/>
+                </a:solidFill>
+                <a:latin typeface="Noto Sans KR W850"/>
+                <a:ea typeface="Noto Sans KR W850"/>
+                <a:cs typeface="Noto Sans KR W850"/>
+              </a:rPr>
+              <a:t>더 굽혀지지 않나요?</a:t>
+            </a:r>
+          </a:p>
+        </p:txBody>
+      </p:sp>
+      <p:sp>
+        <p:nvSpPr>
+          <p:cNvPr id="10" name="06_item-h_08"/>
+          <p:cNvSpPr txBox="1"/>
+          <p:nvPr/>
+        </p:nvSpPr>
+        <p:spPr>
+          <a:xfrm>
+            <a:off x="2179588" y="9933432"/>
+            <a:ext cx="1508075" cy="544830"/>
+          </a:xfrm>
+          <a:prstGeom prst="rect">
+            <a:avLst/>
+          </a:prstGeom>
+          <a:noFill/>
+        </p:spPr>
+        <p:txBody>
+          <a:bodyPr wrap="none" lIns="0" rIns="0" tIns="0" bIns="0" anchor="t">
+            <a:noAutofit/>
+          </a:bodyPr>
+          <a:lstStyle/>
+          <a:p>
+            <a:pPr algn="ctr">
+              <a:lnSpc>
+                <a:spcPct val="100000"/>
+              </a:lnSpc>
+              <a:spcBef>
+                <a:spcPts val="0"/>
+              </a:spcBef>
+              <a:spcAft>
+                <a:spcPts val="0"/>
+              </a:spcAft>
+            </a:pPr>
+            <a:r>
+              <a:rPr sz="3300" b="0" i="0" spc="-99" lang="ko-KR" altLang="en-US">
+                <a:solidFill>
+                  <a:srgbClr val="121416"/>
+                </a:solidFill>
+                <a:latin typeface="Noto Sans KR W800"/>
+                <a:ea typeface="Noto Sans KR W800"/>
+                <a:cs typeface="Noto Sans KR W800"/>
+              </a:rPr>
+              <a:t>깊이</a:t>
+            </a:r>
+          </a:p>
+        </p:txBody>
+      </p:sp>
+      <p:sp>
+        <p:nvSpPr>
+          <p:cNvPr id="11" name="06_body_09"/>
+          <p:cNvSpPr txBox="1"/>
+          <p:nvPr/>
+        </p:nvSpPr>
+        <p:spPr>
+          <a:xfrm>
+            <a:off x="1253430" y="10525006"/>
+            <a:ext cx="3360539" cy="495300"/>
+          </a:xfrm>
+          <a:prstGeom prst="rect">
+            <a:avLst/>
+          </a:prstGeom>
+          <a:noFill/>
+        </p:spPr>
+        <p:txBody>
+          <a:bodyPr wrap="none" lIns="0" rIns="0" tIns="0" bIns="0" anchor="t">
+            <a:noAutofit/>
+          </a:bodyPr>
+          <a:lstStyle/>
+          <a:p>
+            <a:pPr algn="ctr">
+              <a:lnSpc>
+                <a:spcPct val="100000"/>
+              </a:lnSpc>
+              <a:spcBef>
+                <a:spcPts val="0"/>
+              </a:spcBef>
+              <a:spcAft>
+                <a:spcPts val="0"/>
+              </a:spcAft>
+            </a:pPr>
+            <a:r>
+              <a:rPr sz="3000" b="0" i="0" spc="-60" lang="ko-KR" altLang="en-US">
                 <a:solidFill>
                   <a:srgbClr val="121416"/>
                 </a:solidFill>
@@ -5819,46 +7897,46 @@
                 <a:ea typeface="Noto Sans KR W500"/>
                 <a:cs typeface="Noto Sans KR W500"/>
               </a:rPr>
-              <a:t>허벅지가 안으로 모이는 움직임,</a:t>
-            </a:r>
-          </a:p>
-        </p:txBody>
-      </p:sp>
-      <p:sp>
-        <p:nvSpPr>
-          <p:cNvPr id="8" name="06_key_05"/>
-          <p:cNvSpPr txBox="1"/>
-          <p:nvPr/>
-        </p:nvSpPr>
-        <p:spPr>
-          <a:xfrm>
-            <a:off x="2434530" y="8282666"/>
-            <a:ext cx="5417939" cy="643890"/>
-          </a:xfrm>
-          <a:prstGeom prst="rect">
-            <a:avLst/>
-          </a:prstGeom>
-          <a:noFill/>
-        </p:spPr>
-        <p:txBody>
-          <a:bodyPr wrap="none" lIns="0" rIns="0" tIns="0" bIns="0" anchor="t">
-            <a:noAutofit/>
-          </a:bodyPr>
-          <a:lstStyle/>
-          <a:p>
-            <a:pPr algn="ctr">
-              <a:lnSpc>
-                <a:spcPct val="100000"/>
-              </a:lnSpc>
-              <a:spcBef>
-                <a:spcPts val="0"/>
-              </a:spcBef>
-              <a:spcAft>
-                <a:spcPts val="0"/>
-              </a:spcAft>
-            </a:pPr>
-            <a:r>
-              <a:rPr sz="3900" b="0" i="0" spc="-117" lang="ko-KR" altLang="en-US">
+              <a:t>높은 박스로 제한</a:t>
+            </a:r>
+          </a:p>
+        </p:txBody>
+      </p:sp>
+      <p:sp>
+        <p:nvSpPr>
+          <p:cNvPr id="12" name="06_item-h_10"/>
+          <p:cNvSpPr txBox="1"/>
+          <p:nvPr/>
+        </p:nvSpPr>
+        <p:spPr>
+          <a:xfrm>
+            <a:off x="6599188" y="9933432"/>
+            <a:ext cx="1508075" cy="544830"/>
+          </a:xfrm>
+          <a:prstGeom prst="rect">
+            <a:avLst/>
+          </a:prstGeom>
+          <a:noFill/>
+        </p:spPr>
+        <p:txBody>
+          <a:bodyPr wrap="none" lIns="0" rIns="0" tIns="0" bIns="0" anchor="t">
+            <a:noAutofit/>
+          </a:bodyPr>
+          <a:lstStyle/>
+          <a:p>
+            <a:pPr algn="ctr">
+              <a:lnSpc>
+                <a:spcPct val="100000"/>
+              </a:lnSpc>
+              <a:spcBef>
+                <a:spcPts val="0"/>
+              </a:spcBef>
+              <a:spcAft>
+                <a:spcPts val="0"/>
+              </a:spcAft>
+            </a:pPr>
+            <a:r>
+              <a:rPr sz="3300" b="0" i="0" spc="-99" lang="ko-KR" altLang="en-US">
                 <a:solidFill>
                   <a:srgbClr val="121416"/>
                 </a:solidFill>
@@ -5866,93 +7944,46 @@
                 <a:ea typeface="Noto Sans KR W800"/>
                 <a:cs typeface="Noto Sans KR W800"/>
               </a:rPr>
-              <a:t>싱글 레그 데드리프트로</a:t>
-            </a:r>
-          </a:p>
-        </p:txBody>
-      </p:sp>
-      <p:sp>
-        <p:nvSpPr>
-          <p:cNvPr id="9" name="06_key_06"/>
-          <p:cNvSpPr txBox="1"/>
-          <p:nvPr/>
-        </p:nvSpPr>
-        <p:spPr>
-          <a:xfrm>
-            <a:off x="2372618" y="8926497"/>
-            <a:ext cx="5541764" cy="643890"/>
-          </a:xfrm>
-          <a:prstGeom prst="rect">
-            <a:avLst/>
-          </a:prstGeom>
-          <a:noFill/>
-        </p:spPr>
-        <p:txBody>
-          <a:bodyPr wrap="none" lIns="0" rIns="0" tIns="0" bIns="0" anchor="t">
-            <a:noAutofit/>
-          </a:bodyPr>
-          <a:lstStyle/>
-          <a:p>
-            <a:pPr algn="ctr">
-              <a:lnSpc>
-                <a:spcPct val="100000"/>
-              </a:lnSpc>
-              <a:spcBef>
-                <a:spcPts val="0"/>
-              </a:spcBef>
-              <a:spcAft>
-                <a:spcPts val="0"/>
-              </a:spcAft>
-            </a:pPr>
-            <a:r>
-              <a:rPr sz="3900" b="0" i="0" spc="-117" lang="ko-KR" altLang="en-US">
-                <a:solidFill>
-                  <a:srgbClr val="121416"/>
-                </a:solidFill>
-                <a:latin typeface="Noto Sans KR W800"/>
-                <a:ea typeface="Noto Sans KR W800"/>
-                <a:cs typeface="Noto Sans KR W800"/>
-              </a:rPr>
-              <a:t>한 발 조절을 연습합니다</a:t>
-            </a:r>
-          </a:p>
-        </p:txBody>
-      </p:sp>
-      <p:sp>
-        <p:nvSpPr>
-          <p:cNvPr id="10" name="06_body_07"/>
-          <p:cNvSpPr txBox="1"/>
-          <p:nvPr/>
-        </p:nvSpPr>
-        <p:spPr>
-          <a:xfrm>
-            <a:off x="1036886" y="9797403"/>
-            <a:ext cx="8213229" cy="544830"/>
-          </a:xfrm>
-          <a:prstGeom prst="rect">
-            <a:avLst/>
-          </a:prstGeom>
-          <a:noFill/>
-        </p:spPr>
-        <p:txBody>
-          <a:bodyPr wrap="none" lIns="0" rIns="0" tIns="0" bIns="0" anchor="t">
-            <a:noAutofit/>
-          </a:bodyPr>
-          <a:lstStyle/>
-          <a:p>
-            <a:pPr algn="ctr">
-              <a:lnSpc>
-                <a:spcPct val="100000"/>
-              </a:lnSpc>
-              <a:spcBef>
-                <a:spcPts val="0"/>
-              </a:spcBef>
-              <a:spcAft>
-                <a:spcPts val="0"/>
-              </a:spcAft>
-            </a:pPr>
-            <a:r>
-              <a:rPr sz="3300" b="0" i="0" spc="-66" lang="ko-KR" altLang="en-US">
+              <a:t>통증</a:t>
+            </a:r>
+          </a:p>
+        </p:txBody>
+      </p:sp>
+      <p:sp>
+        <p:nvSpPr>
+          <p:cNvPr id="13" name="06_body_11"/>
+          <p:cNvSpPr txBox="1"/>
+          <p:nvPr/>
+        </p:nvSpPr>
+        <p:spPr>
+          <a:xfrm>
+            <a:off x="5398889" y="10525006"/>
+            <a:ext cx="3908822" cy="495300"/>
+          </a:xfrm>
+          <a:prstGeom prst="rect">
+            <a:avLst/>
+          </a:prstGeom>
+          <a:noFill/>
+        </p:spPr>
+        <p:txBody>
+          <a:bodyPr wrap="none" lIns="0" rIns="0" tIns="0" bIns="0" anchor="t">
+            <a:noAutofit/>
+          </a:bodyPr>
+          <a:lstStyle/>
+          <a:p>
+            <a:pPr algn="ctr">
+              <a:lnSpc>
+                <a:spcPct val="100000"/>
+              </a:lnSpc>
+              <a:spcBef>
+                <a:spcPts val="0"/>
+              </a:spcBef>
+              <a:spcAft>
+                <a:spcPts val="0"/>
+              </a:spcAft>
+            </a:pPr>
+            <a:r>
+              <a:rPr sz="3000" b="0" i="0" spc="-60" lang="ko-KR" altLang="en-US">
                 <a:solidFill>
                   <a:srgbClr val="121416"/>
                 </a:solidFill>
@@ -5960,61 +7991,14 @@
                 <a:ea typeface="Noto Sans KR W500"/>
                 <a:cs typeface="Noto Sans KR W500"/>
               </a:rPr>
-              <a:t>엉덩이 근육을 크게 쓰는 동작으로 보고되고,</a:t>
-            </a:r>
-          </a:p>
-        </p:txBody>
-      </p:sp>
-      <p:sp>
-        <p:nvSpPr>
-          <p:cNvPr id="11" name="06_body_08"/>
-          <p:cNvSpPr txBox="1"/>
-          <p:nvPr/>
-        </p:nvSpPr>
-        <p:spPr>
-          <a:xfrm>
-            <a:off x="1407765" y="10392418"/>
-            <a:ext cx="7471470" cy="544830"/>
-          </a:xfrm>
-          <a:prstGeom prst="rect">
-            <a:avLst/>
-          </a:prstGeom>
-          <a:noFill/>
-        </p:spPr>
-        <p:txBody>
-          <a:bodyPr wrap="none" lIns="0" rIns="0" tIns="0" bIns="0" anchor="t">
-            <a:noAutofit/>
-          </a:bodyPr>
-          <a:lstStyle/>
-          <a:p>
-            <a:pPr algn="ctr">
-              <a:lnSpc>
-                <a:spcPct val="100000"/>
-              </a:lnSpc>
-              <a:spcBef>
-                <a:spcPts val="0"/>
-              </a:spcBef>
-              <a:spcAft>
-                <a:spcPts val="0"/>
-              </a:spcAft>
-            </a:pPr>
-            <a:r>
-              <a:rPr sz="3300" b="0" i="0" spc="-66" lang="ko-KR" altLang="en-US">
-                <a:solidFill>
-                  <a:srgbClr val="121416"/>
-                </a:solidFill>
-                <a:latin typeface="Noto Sans KR W500"/>
-                <a:ea typeface="Noto Sans KR W500"/>
-                <a:cs typeface="Noto Sans KR W500"/>
-              </a:rPr>
-              <a:t>엉덩관절+무릎 운동 병행이 권장됩니다.</a:t>
-            </a:r>
-          </a:p>
-        </p:txBody>
-      </p:sp>
-      <p:sp>
-        <p:nvSpPr>
-          <p:cNvPr id="12" name="06_B01프레임"/>
+              <a:t>운동 중·다음 날 확인</a:t>
+            </a:r>
+          </a:p>
+        </p:txBody>
+      </p:sp>
+      <p:sp>
+        <p:nvSpPr>
+          <p:cNvPr id="14" name="06_B01프레임"/>
           <p:cNvSpPr/>
           <p:nvPr/>
         </p:nvSpPr>
@@ -6070,40 +8054,86 @@
         <p:nvPr/>
       </p:nvGrpSpPr>
       <p:grpSpPr/>
-      <p:pic>
-        <p:nvPicPr>
-          <p:cNvPr id="2" name="07_도식" descr="c07-pic1.png"/>
-          <p:cNvPicPr>
-            <a:picLocks noChangeAspect="1"/>
-          </p:cNvPicPr>
-          <p:nvPr/>
-        </p:nvPicPr>
-        <p:blipFill>
-          <a:blip r:embed="rId2"/>
-          <a:stretch>
-            <a:fillRect/>
-          </a:stretch>
-        </p:blipFill>
-        <p:spPr>
-          <a:xfrm>
-            <a:off x="1028700" y="3124200"/>
-            <a:ext cx="8229600" cy="4629150"/>
-          </a:xfrm>
-          <a:prstGeom prst="rect">
-            <a:avLst/>
-          </a:prstGeom>
-        </p:spPr>
-      </p:pic>
-      <p:sp>
-        <p:nvSpPr>
-          <p:cNvPr id="3" name="07_headline_01"/>
-          <p:cNvSpPr txBox="1"/>
-          <p:nvPr/>
-        </p:nvSpPr>
-        <p:spPr>
-          <a:xfrm>
-            <a:off x="1255514" y="997077"/>
-            <a:ext cx="7775823" cy="1040130"/>
+      <p:sp>
+        <p:nvSpPr>
+          <p:cNvPr id="2" name="07_사진영상자리_07-1"/>
+          <p:cNvSpPr/>
+          <p:nvPr/>
+        </p:nvSpPr>
+        <p:spPr>
+          <a:xfrm>
+            <a:off x="914400" y="3238500"/>
+            <a:ext cx="4114800" cy="4114800"/>
+          </a:xfrm>
+          <a:prstGeom prst="roundRect">
+            <a:avLst>
+              <a:gd name="adj" fmla="val 0"/>
+            </a:avLst>
+          </a:prstGeom>
+          <a:solidFill>
+            <a:srgbClr val="F3F5F7"/>
+          </a:solidFill>
+          <a:ln w="28575">
+            <a:solidFill>
+              <a:srgbClr val="B9C4CF"/>
+            </a:solidFill>
+            <a:prstDash val="dash"/>
+          </a:ln>
+          <a:effectLst/>
+        </p:spPr>
+        <p:txBody>
+          <a:bodyPr rtlCol="0" anchor="ctr"/>
+          <a:lstStyle/>
+          <a:p>
+            <a:pPr algn="ctr"/>
+          </a:p>
+        </p:txBody>
+      </p:sp>
+      <p:sp>
+        <p:nvSpPr>
+          <p:cNvPr id="3" name="07_사진영상자리_07-2"/>
+          <p:cNvSpPr/>
+          <p:nvPr/>
+        </p:nvSpPr>
+        <p:spPr>
+          <a:xfrm>
+            <a:off x="5257800" y="3238500"/>
+            <a:ext cx="4114800" cy="4114800"/>
+          </a:xfrm>
+          <a:prstGeom prst="roundRect">
+            <a:avLst>
+              <a:gd name="adj" fmla="val 0"/>
+            </a:avLst>
+          </a:prstGeom>
+          <a:solidFill>
+            <a:srgbClr val="F3F5F7"/>
+          </a:solidFill>
+          <a:ln w="28575">
+            <a:solidFill>
+              <a:srgbClr val="B9C4CF"/>
+            </a:solidFill>
+            <a:prstDash val="dash"/>
+          </a:ln>
+          <a:effectLst/>
+        </p:spPr>
+        <p:txBody>
+          <a:bodyPr rtlCol="0" anchor="ctr"/>
+          <a:lstStyle/>
+          <a:p>
+            <a:pPr algn="ctr"/>
+          </a:p>
+        </p:txBody>
+      </p:sp>
+      <p:sp>
+        <p:nvSpPr>
+          <p:cNvPr id="4" name="07_headline_01"/>
+          <p:cNvSpPr txBox="1"/>
+          <p:nvPr/>
+        </p:nvSpPr>
+        <p:spPr>
+          <a:xfrm>
+            <a:off x="2894261" y="997077"/>
+            <a:ext cx="4498479" cy="1040130"/>
           </a:xfrm>
           <a:prstGeom prst="rect">
             <a:avLst/>
@@ -6136,21 +8166,21 @@
                 <a:ea typeface="Noto Sans KR W850"/>
                 <a:cs typeface="Noto Sans KR W850"/>
               </a:rPr>
-              <a:t>싱글 레그 데드리프트,</a:t>
-            </a:r>
-          </a:p>
-        </p:txBody>
-      </p:sp>
-      <p:sp>
-        <p:nvSpPr>
-          <p:cNvPr id="4" name="07_headline_02"/>
-          <p:cNvSpPr txBox="1"/>
-          <p:nvPr/>
-        </p:nvSpPr>
-        <p:spPr>
-          <a:xfrm>
-            <a:off x="2540050" y="1957167"/>
-            <a:ext cx="5206752" cy="1040130"/>
+              <a:t>무릎 펴기는</a:t>
+            </a:r>
+          </a:p>
+        </p:txBody>
+      </p:sp>
+      <p:sp>
+        <p:nvSpPr>
+          <p:cNvPr id="5" name="07_headline_02"/>
+          <p:cNvSpPr txBox="1"/>
+          <p:nvPr/>
+        </p:nvSpPr>
+        <p:spPr>
+          <a:xfrm>
+            <a:off x="2451348" y="1957167"/>
+            <a:ext cx="5384304" cy="1040130"/>
           </a:xfrm>
           <a:prstGeom prst="rect">
             <a:avLst/>
@@ -6183,7 +8213,7 @@
                 <a:ea typeface="Noto Sans KR W850"/>
                 <a:cs typeface="Noto Sans KR W850"/>
               </a:rPr>
-              <a:t>이것만</a:t>
+              <a:t>90°→45°</a:t>
             </a:r>
             <a:r>
               <a:rPr sz="6300" b="0" i="0" spc="-220" lang="ko-KR" altLang="en-US">
@@ -6194,140 +8224,93 @@
                 <a:ea typeface="Noto Sans KR W850"/>
                 <a:cs typeface="Noto Sans KR W850"/>
               </a:rPr>
-              <a:t> 보세요</a:t>
-            </a:r>
-          </a:p>
-        </p:txBody>
-      </p:sp>
-      <p:sp>
-        <p:nvSpPr>
-          <p:cNvPr id="5" name="07_key_03"/>
-          <p:cNvSpPr txBox="1"/>
-          <p:nvPr/>
-        </p:nvSpPr>
-        <p:spPr>
-          <a:xfrm>
-            <a:off x="3165128" y="8136255"/>
-            <a:ext cx="3956745" cy="742950"/>
-          </a:xfrm>
-          <a:prstGeom prst="rect">
-            <a:avLst/>
-          </a:prstGeom>
-          <a:noFill/>
-        </p:spPr>
-        <p:txBody>
-          <a:bodyPr wrap="none" lIns="0" rIns="0" tIns="0" bIns="0" anchor="t">
-            <a:noAutofit/>
-          </a:bodyPr>
-          <a:lstStyle/>
-          <a:p>
-            <a:pPr algn="ctr">
-              <a:lnSpc>
-                <a:spcPct val="100000"/>
-              </a:lnSpc>
-              <a:spcBef>
-                <a:spcPts val="0"/>
-              </a:spcBef>
-              <a:spcAft>
-                <a:spcPts val="0"/>
-              </a:spcAft>
-            </a:pPr>
-            <a:r>
-              <a:rPr sz="4500" b="0" i="0" spc="-135" lang="ko-KR" altLang="en-US">
-                <a:solidFill>
-                  <a:srgbClr val="121416"/>
-                </a:solidFill>
-                <a:latin typeface="Noto Sans KR W850"/>
-                <a:ea typeface="Noto Sans KR W850"/>
-                <a:cs typeface="Noto Sans KR W850"/>
-              </a:rPr>
-              <a:t>엉덩이가 먼저</a:t>
-            </a:r>
-          </a:p>
-        </p:txBody>
-      </p:sp>
-      <p:sp>
-        <p:nvSpPr>
-          <p:cNvPr id="6" name="07_key_04"/>
-          <p:cNvSpPr txBox="1"/>
-          <p:nvPr/>
-        </p:nvSpPr>
-        <p:spPr>
-          <a:xfrm>
-            <a:off x="3276005" y="8844826"/>
-            <a:ext cx="3734991" cy="742950"/>
-          </a:xfrm>
-          <a:prstGeom prst="rect">
-            <a:avLst/>
-          </a:prstGeom>
-          <a:noFill/>
-        </p:spPr>
-        <p:txBody>
-          <a:bodyPr wrap="none" lIns="0" rIns="0" tIns="0" bIns="0" anchor="t">
-            <a:noAutofit/>
-          </a:bodyPr>
-          <a:lstStyle/>
-          <a:p>
-            <a:pPr algn="ctr">
-              <a:lnSpc>
-                <a:spcPct val="100000"/>
-              </a:lnSpc>
-              <a:spcBef>
-                <a:spcPts val="0"/>
-              </a:spcBef>
-              <a:spcAft>
-                <a:spcPts val="0"/>
-              </a:spcAft>
-            </a:pPr>
-            <a:r>
-              <a:rPr sz="4500" b="0" i="0" spc="-135" lang="ko-KR" altLang="en-US">
-                <a:solidFill>
-                  <a:srgbClr val="121416"/>
-                </a:solidFill>
-                <a:latin typeface="Noto Sans KR W850"/>
-                <a:ea typeface="Noto Sans KR W850"/>
-                <a:cs typeface="Noto Sans KR W850"/>
-              </a:rPr>
-              <a:t>뒤로 가나요?</a:t>
-            </a:r>
-          </a:p>
-        </p:txBody>
-      </p:sp>
-      <p:sp>
-        <p:nvSpPr>
-          <p:cNvPr id="7" name="07_item-h_05"/>
-          <p:cNvSpPr txBox="1"/>
-          <p:nvPr/>
-        </p:nvSpPr>
-        <p:spPr>
-          <a:xfrm>
-            <a:off x="2179588" y="9895332"/>
-            <a:ext cx="1508075" cy="544830"/>
-          </a:xfrm>
-          <a:prstGeom prst="rect">
-            <a:avLst/>
-          </a:prstGeom>
-          <a:noFill/>
-        </p:spPr>
-        <p:txBody>
-          <a:bodyPr wrap="none" lIns="0" rIns="0" tIns="0" bIns="0" anchor="t">
-            <a:noAutofit/>
-          </a:bodyPr>
-          <a:lstStyle/>
-          <a:p>
-            <a:pPr algn="ctr">
-              <a:lnSpc>
-                <a:spcPct val="100000"/>
-              </a:lnSpc>
-              <a:spcBef>
-                <a:spcPts val="0"/>
-              </a:spcBef>
-              <a:spcAft>
-                <a:spcPts val="0"/>
-              </a:spcAft>
-            </a:pPr>
-            <a:r>
-              <a:rPr sz="3300" b="0" i="0" spc="-99" lang="ko-KR" altLang="en-US">
+              <a:t>까지</a:t>
+            </a:r>
+          </a:p>
+        </p:txBody>
+      </p:sp>
+      <p:sp>
+        <p:nvSpPr>
+          <p:cNvPr id="6" name="07_g-tag_03"/>
+          <p:cNvSpPr txBox="1"/>
+          <p:nvPr/>
+        </p:nvSpPr>
+        <p:spPr>
+          <a:xfrm>
+            <a:off x="1664196" y="4553391"/>
+            <a:ext cx="2615208" cy="396240"/>
+          </a:xfrm>
+          <a:prstGeom prst="rect">
+            <a:avLst/>
+          </a:prstGeom>
+          <a:noFill/>
+        </p:spPr>
+        <p:txBody>
+          <a:bodyPr wrap="none" lIns="0" rIns="0" tIns="0" bIns="0" anchor="t">
+            <a:noAutofit/>
+          </a:bodyPr>
+          <a:lstStyle/>
+          <a:p>
+            <a:pPr algn="ctr">
+              <a:lnSpc>
+                <a:spcPct val="100000"/>
+              </a:lnSpc>
+              <a:spcBef>
+                <a:spcPts val="0"/>
+              </a:spcBef>
+              <a:spcAft>
+                <a:spcPts val="0"/>
+              </a:spcAft>
+            </a:pPr>
+            <a:r>
+              <a:rPr sz="2400" b="0" i="0" spc="0" lang="ko-KR" altLang="en-US">
+                <a:solidFill>
+                  <a:srgbClr val="0879D8"/>
+                </a:solidFill>
+                <a:latin typeface="Noto Sans KR W700"/>
+                <a:ea typeface="Noto Sans KR W700"/>
+                <a:cs typeface="Noto Sans KR W700"/>
+              </a:rPr>
+              <a:t>사진 넣는 자리</a:t>
+            </a:r>
+          </a:p>
+        </p:txBody>
+      </p:sp>
+      <p:sp>
+        <p:nvSpPr>
+          <p:cNvPr id="7" name="07_strong_04"/>
+          <p:cNvSpPr txBox="1"/>
+          <p:nvPr/>
+        </p:nvSpPr>
+        <p:spPr>
+          <a:xfrm>
+            <a:off x="1855440" y="5050215"/>
+            <a:ext cx="2232720" cy="495300"/>
+          </a:xfrm>
+          <a:prstGeom prst="rect">
+            <a:avLst/>
+          </a:prstGeom>
+          <a:noFill/>
+        </p:spPr>
+        <p:txBody>
+          <a:bodyPr wrap="none" lIns="0" rIns="0" tIns="0" bIns="0" anchor="t">
+            <a:noAutofit/>
+          </a:bodyPr>
+          <a:lstStyle/>
+          <a:p>
+            <a:pPr algn="ctr">
+              <a:lnSpc>
+                <a:spcPct val="100000"/>
+              </a:lnSpc>
+              <a:spcBef>
+                <a:spcPts val="0"/>
+              </a:spcBef>
+              <a:spcAft>
+                <a:spcPts val="0"/>
+              </a:spcAft>
+            </a:pPr>
+            <a:r>
+              <a:rPr sz="3000" b="0" i="0" spc="-60" lang="ko-KR" altLang="en-US">
                 <a:solidFill>
                   <a:srgbClr val="121416"/>
                 </a:solidFill>
@@ -6335,68 +8318,115 @@
                 <a:ea typeface="Noto Sans KR W800"/>
                 <a:cs typeface="Noto Sans KR W800"/>
               </a:rPr>
-              <a:t>무릎</a:t>
-            </a:r>
-          </a:p>
-        </p:txBody>
-      </p:sp>
-      <p:sp>
-        <p:nvSpPr>
-          <p:cNvPr id="8" name="07_body_06"/>
-          <p:cNvSpPr txBox="1"/>
-          <p:nvPr/>
-        </p:nvSpPr>
-        <p:spPr>
-          <a:xfrm>
-            <a:off x="1200299" y="10505956"/>
-            <a:ext cx="3466802" cy="495300"/>
-          </a:xfrm>
-          <a:prstGeom prst="rect">
-            <a:avLst/>
-          </a:prstGeom>
-          <a:noFill/>
-        </p:spPr>
-        <p:txBody>
-          <a:bodyPr wrap="none" lIns="0" rIns="0" tIns="0" bIns="0" anchor="t">
-            <a:noAutofit/>
-          </a:bodyPr>
-          <a:lstStyle/>
-          <a:p>
-            <a:pPr algn="ctr">
-              <a:lnSpc>
-                <a:spcPct val="100000"/>
-              </a:lnSpc>
-              <a:spcBef>
-                <a:spcPts val="0"/>
-              </a:spcBef>
-              <a:spcAft>
-                <a:spcPts val="0"/>
-              </a:spcAft>
-            </a:pPr>
-            <a:r>
-              <a:rPr sz="3000" b="0" i="0" spc="-60" lang="ko-KR" altLang="en-US">
-                <a:solidFill>
-                  <a:srgbClr val="121416"/>
+              <a:t>시작 자세</a:t>
+            </a:r>
+          </a:p>
+        </p:txBody>
+      </p:sp>
+      <p:sp>
+        <p:nvSpPr>
+          <p:cNvPr id="8" name="07_g-spec_05"/>
+          <p:cNvSpPr txBox="1"/>
+          <p:nvPr/>
+        </p:nvSpPr>
+        <p:spPr>
+          <a:xfrm>
+            <a:off x="1819870" y="5658291"/>
+            <a:ext cx="2303711" cy="396240"/>
+          </a:xfrm>
+          <a:prstGeom prst="rect">
+            <a:avLst/>
+          </a:prstGeom>
+          <a:noFill/>
+        </p:spPr>
+        <p:txBody>
+          <a:bodyPr wrap="none" lIns="0" rIns="0" tIns="0" bIns="0" anchor="t">
+            <a:noAutofit/>
+          </a:bodyPr>
+          <a:lstStyle/>
+          <a:p>
+            <a:pPr algn="ctr">
+              <a:lnSpc>
+                <a:spcPct val="100000"/>
+              </a:lnSpc>
+              <a:spcBef>
+                <a:spcPts val="0"/>
+              </a:spcBef>
+              <a:spcAft>
+                <a:spcPts val="0"/>
+              </a:spcAft>
+            </a:pPr>
+            <a:r>
+              <a:rPr sz="2400" b="0" i="0" spc="0" lang="ko-KR" altLang="en-US">
+                <a:solidFill>
+                  <a:srgbClr val="5E6570"/>
                 </a:solidFill>
                 <a:latin typeface="Noto Sans KR W500"/>
                 <a:ea typeface="Noto Sans KR W500"/>
                 <a:cs typeface="Noto Sans KR W500"/>
               </a:rPr>
-              <a:t>둘째 발가락 방향,</a:t>
-            </a:r>
-          </a:p>
-        </p:txBody>
-      </p:sp>
-      <p:sp>
-        <p:nvSpPr>
-          <p:cNvPr id="9" name="07_body_07"/>
-          <p:cNvSpPr txBox="1"/>
-          <p:nvPr/>
-        </p:nvSpPr>
-        <p:spPr>
-          <a:xfrm>
-            <a:off x="1081980" y="11024027"/>
-            <a:ext cx="3703439" cy="495300"/>
+              <a:t>1:1 · 옆모습</a:t>
+            </a:r>
+          </a:p>
+        </p:txBody>
+      </p:sp>
+      <p:sp>
+        <p:nvSpPr>
+          <p:cNvPr id="9" name="07_g-tag_06"/>
+          <p:cNvSpPr txBox="1"/>
+          <p:nvPr/>
+        </p:nvSpPr>
+        <p:spPr>
+          <a:xfrm>
+            <a:off x="6007596" y="4553391"/>
+            <a:ext cx="2615208" cy="396240"/>
+          </a:xfrm>
+          <a:prstGeom prst="rect">
+            <a:avLst/>
+          </a:prstGeom>
+          <a:noFill/>
+        </p:spPr>
+        <p:txBody>
+          <a:bodyPr wrap="none" lIns="0" rIns="0" tIns="0" bIns="0" anchor="t">
+            <a:noAutofit/>
+          </a:bodyPr>
+          <a:lstStyle/>
+          <a:p>
+            <a:pPr algn="ctr">
+              <a:lnSpc>
+                <a:spcPct val="100000"/>
+              </a:lnSpc>
+              <a:spcBef>
+                <a:spcPts val="0"/>
+              </a:spcBef>
+              <a:spcAft>
+                <a:spcPts val="0"/>
+              </a:spcAft>
+            </a:pPr>
+            <a:r>
+              <a:rPr sz="2400" b="0" i="0" spc="0" lang="ko-KR" altLang="en-US">
+                <a:solidFill>
+                  <a:srgbClr val="0879D8"/>
+                </a:solidFill>
+                <a:latin typeface="Noto Sans KR W700"/>
+                <a:ea typeface="Noto Sans KR W700"/>
+                <a:cs typeface="Noto Sans KR W700"/>
+              </a:rPr>
+              <a:t>사진 넣는 자리</a:t>
+            </a:r>
+          </a:p>
+        </p:txBody>
+      </p:sp>
+      <p:sp>
+        <p:nvSpPr>
+          <p:cNvPr id="10" name="07_strong_07"/>
+          <p:cNvSpPr txBox="1"/>
+          <p:nvPr/>
+        </p:nvSpPr>
+        <p:spPr>
+          <a:xfrm>
+            <a:off x="6198840" y="5050215"/>
+            <a:ext cx="2232720" cy="495300"/>
           </a:xfrm>
           <a:prstGeom prst="rect">
             <a:avLst/>
@@ -6424,26 +8454,73 @@
               <a:rPr sz="3000" b="0" i="0" spc="-60" lang="ko-KR" altLang="en-US">
                 <a:solidFill>
                   <a:srgbClr val="121416"/>
+                </a:solidFill>
+                <a:latin typeface="Noto Sans KR W800"/>
+                <a:ea typeface="Noto Sans KR W800"/>
+                <a:cs typeface="Noto Sans KR W800"/>
+              </a:rPr>
+              <a:t>멈춘 자세</a:t>
+            </a:r>
+          </a:p>
+        </p:txBody>
+      </p:sp>
+      <p:sp>
+        <p:nvSpPr>
+          <p:cNvPr id="11" name="07_g-spec_08"/>
+          <p:cNvSpPr txBox="1"/>
+          <p:nvPr/>
+        </p:nvSpPr>
+        <p:spPr>
+          <a:xfrm>
+            <a:off x="6163270" y="5658291"/>
+            <a:ext cx="2303711" cy="396240"/>
+          </a:xfrm>
+          <a:prstGeom prst="rect">
+            <a:avLst/>
+          </a:prstGeom>
+          <a:noFill/>
+        </p:spPr>
+        <p:txBody>
+          <a:bodyPr wrap="none" lIns="0" rIns="0" tIns="0" bIns="0" anchor="t">
+            <a:noAutofit/>
+          </a:bodyPr>
+          <a:lstStyle/>
+          <a:p>
+            <a:pPr algn="ctr">
+              <a:lnSpc>
+                <a:spcPct val="100000"/>
+              </a:lnSpc>
+              <a:spcBef>
+                <a:spcPts val="0"/>
+              </a:spcBef>
+              <a:spcAft>
+                <a:spcPts val="0"/>
+              </a:spcAft>
+            </a:pPr>
+            <a:r>
+              <a:rPr sz="2400" b="0" i="0" spc="0" lang="ko-KR" altLang="en-US">
+                <a:solidFill>
+                  <a:srgbClr val="5E6570"/>
                 </a:solidFill>
                 <a:latin typeface="Noto Sans KR W500"/>
                 <a:ea typeface="Noto Sans KR W500"/>
                 <a:cs typeface="Noto Sans KR W500"/>
               </a:rPr>
-              <a:t>안으로 모이지 않게</a:t>
-            </a:r>
-          </a:p>
-        </p:txBody>
-      </p:sp>
-      <p:sp>
-        <p:nvSpPr>
-          <p:cNvPr id="10" name="07_item-h_08"/>
-          <p:cNvSpPr txBox="1"/>
-          <p:nvPr/>
-        </p:nvSpPr>
-        <p:spPr>
-          <a:xfrm>
-            <a:off x="6599188" y="9895332"/>
-            <a:ext cx="1508075" cy="544830"/>
+              <a:t>1:1 · 옆모습</a:t>
+            </a:r>
+          </a:p>
+        </p:txBody>
+      </p:sp>
+      <p:sp>
+        <p:nvSpPr>
+          <p:cNvPr id="12" name="07_item-h_09"/>
+          <p:cNvSpPr txBox="1"/>
+          <p:nvPr/>
+        </p:nvSpPr>
+        <p:spPr>
+          <a:xfrm>
+            <a:off x="1729234" y="7609332"/>
+            <a:ext cx="2484983" cy="544830"/>
           </a:xfrm>
           <a:prstGeom prst="rect">
             <a:avLst/>
@@ -6476,46 +8553,187 @@
                 <a:ea typeface="Noto Sans KR W800"/>
                 <a:cs typeface="Noto Sans KR W800"/>
               </a:rPr>
-              <a:t>골반</a:t>
-            </a:r>
-          </a:p>
-        </p:txBody>
-      </p:sp>
-      <p:sp>
-        <p:nvSpPr>
-          <p:cNvPr id="11" name="07_body_09"/>
-          <p:cNvSpPr txBox="1"/>
-          <p:nvPr/>
-        </p:nvSpPr>
-        <p:spPr>
-          <a:xfrm>
-            <a:off x="6065490" y="10505956"/>
-            <a:ext cx="2575620" cy="495300"/>
-          </a:xfrm>
-          <a:prstGeom prst="rect">
-            <a:avLst/>
-          </a:prstGeom>
-          <a:noFill/>
-        </p:spPr>
-        <p:txBody>
-          <a:bodyPr wrap="none" lIns="0" rIns="0" tIns="0" bIns="0" anchor="t">
-            <a:noAutofit/>
-          </a:bodyPr>
-          <a:lstStyle/>
-          <a:p>
-            <a:pPr algn="ctr">
-              <a:lnSpc>
-                <a:spcPct val="100000"/>
-              </a:lnSpc>
-              <a:spcBef>
-                <a:spcPts val="0"/>
-              </a:spcBef>
-              <a:spcAft>
-                <a:spcPts val="0"/>
-              </a:spcAft>
-            </a:pPr>
-            <a:r>
-              <a:rPr sz="3000" b="0" i="0" spc="-60" lang="ko-KR" altLang="en-US">
+              <a:t>시작 · 90°</a:t>
+            </a:r>
+          </a:p>
+        </p:txBody>
+      </p:sp>
+      <p:sp>
+        <p:nvSpPr>
+          <p:cNvPr id="13" name="07_item-h_10"/>
+          <p:cNvSpPr txBox="1"/>
+          <p:nvPr/>
+        </p:nvSpPr>
+        <p:spPr>
+          <a:xfrm>
+            <a:off x="6072634" y="7609332"/>
+            <a:ext cx="2484983" cy="544830"/>
+          </a:xfrm>
+          <a:prstGeom prst="rect">
+            <a:avLst/>
+          </a:prstGeom>
+          <a:noFill/>
+        </p:spPr>
+        <p:txBody>
+          <a:bodyPr wrap="none" lIns="0" rIns="0" tIns="0" bIns="0" anchor="t">
+            <a:noAutofit/>
+          </a:bodyPr>
+          <a:lstStyle/>
+          <a:p>
+            <a:pPr algn="ctr">
+              <a:lnSpc>
+                <a:spcPct val="100000"/>
+              </a:lnSpc>
+              <a:spcBef>
+                <a:spcPts val="0"/>
+              </a:spcBef>
+              <a:spcAft>
+                <a:spcPts val="0"/>
+              </a:spcAft>
+            </a:pPr>
+            <a:r>
+              <a:rPr sz="3300" b="0" i="0" spc="-99" lang="ko-KR" altLang="en-US">
+                <a:solidFill>
+                  <a:srgbClr val="121416"/>
+                </a:solidFill>
+                <a:latin typeface="Noto Sans KR W800"/>
+                <a:ea typeface="Noto Sans KR W800"/>
+                <a:cs typeface="Noto Sans KR W800"/>
+              </a:rPr>
+              <a:t>멈춤 · 45°</a:t>
+            </a:r>
+          </a:p>
+        </p:txBody>
+      </p:sp>
+      <p:sp>
+        <p:nvSpPr>
+          <p:cNvPr id="14" name="07_abs_11"/>
+          <p:cNvSpPr txBox="1"/>
+          <p:nvPr/>
+        </p:nvSpPr>
+        <p:spPr>
+          <a:xfrm>
+            <a:off x="3378101" y="8525256"/>
+            <a:ext cx="3530798" cy="643890"/>
+          </a:xfrm>
+          <a:prstGeom prst="rect">
+            <a:avLst/>
+          </a:prstGeom>
+          <a:noFill/>
+        </p:spPr>
+        <p:txBody>
+          <a:bodyPr wrap="none" lIns="0" rIns="0" tIns="0" bIns="0" anchor="t">
+            <a:noAutofit/>
+          </a:bodyPr>
+          <a:lstStyle/>
+          <a:p>
+            <a:pPr algn="ctr">
+              <a:lnSpc>
+                <a:spcPct val="100000"/>
+              </a:lnSpc>
+              <a:spcBef>
+                <a:spcPts val="0"/>
+              </a:spcBef>
+              <a:spcAft>
+                <a:spcPts val="0"/>
+              </a:spcAft>
+            </a:pPr>
+            <a:r>
+              <a:rPr sz="3900" b="0" i="0" spc="-117" lang="ko-KR" altLang="en-US">
+                <a:solidFill>
+                  <a:srgbClr val="121416"/>
+                </a:solidFill>
+                <a:latin typeface="Noto Sans KR W800"/>
+                <a:ea typeface="Noto Sans KR W800"/>
+                <a:cs typeface="Noto Sans KR W800"/>
+              </a:rPr>
+              <a:t>다리를 끝까지</a:t>
+            </a:r>
+          </a:p>
+        </p:txBody>
+      </p:sp>
+      <p:sp>
+        <p:nvSpPr>
+          <p:cNvPr id="15" name="07_abs_12"/>
+          <p:cNvSpPr txBox="1"/>
+          <p:nvPr/>
+        </p:nvSpPr>
+        <p:spPr>
+          <a:xfrm>
+            <a:off x="3378101" y="9169086"/>
+            <a:ext cx="3530798" cy="643890"/>
+          </a:xfrm>
+          <a:prstGeom prst="rect">
+            <a:avLst/>
+          </a:prstGeom>
+          <a:noFill/>
+        </p:spPr>
+        <p:txBody>
+          <a:bodyPr wrap="none" lIns="0" rIns="0" tIns="0" bIns="0" anchor="t">
+            <a:noAutofit/>
+          </a:bodyPr>
+          <a:lstStyle/>
+          <a:p>
+            <a:pPr algn="ctr">
+              <a:lnSpc>
+                <a:spcPct val="100000"/>
+              </a:lnSpc>
+              <a:spcBef>
+                <a:spcPts val="0"/>
+              </a:spcBef>
+              <a:spcAft>
+                <a:spcPts val="0"/>
+              </a:spcAft>
+            </a:pPr>
+            <a:r>
+              <a:rPr sz="3900" b="0" i="0" spc="-117" lang="ko-KR" altLang="en-US">
+                <a:solidFill>
+                  <a:srgbClr val="121416"/>
+                </a:solidFill>
+                <a:latin typeface="Noto Sans KR W800"/>
+                <a:ea typeface="Noto Sans KR W800"/>
+                <a:cs typeface="Noto Sans KR W800"/>
+              </a:rPr>
+              <a:t>펴지 않습니다</a:t>
+            </a:r>
+          </a:p>
+        </p:txBody>
+      </p:sp>
+      <p:sp>
+        <p:nvSpPr>
+          <p:cNvPr id="16" name="07_abs_13"/>
+          <p:cNvSpPr txBox="1"/>
+          <p:nvPr/>
+        </p:nvSpPr>
+        <p:spPr>
+          <a:xfrm>
+            <a:off x="2524423" y="10123932"/>
+            <a:ext cx="5238006" cy="544830"/>
+          </a:xfrm>
+          <a:prstGeom prst="rect">
+            <a:avLst/>
+          </a:prstGeom>
+          <a:noFill/>
+        </p:spPr>
+        <p:txBody>
+          <a:bodyPr wrap="none" lIns="0" rIns="0" tIns="0" bIns="0" anchor="t">
+            <a:noAutofit/>
+          </a:bodyPr>
+          <a:lstStyle/>
+          <a:p>
+            <a:pPr algn="ctr">
+              <a:lnSpc>
+                <a:spcPct val="100000"/>
+              </a:lnSpc>
+              <a:spcBef>
+                <a:spcPts val="0"/>
+              </a:spcBef>
+              <a:spcAft>
+                <a:spcPts val="0"/>
+              </a:spcAft>
+            </a:pPr>
+            <a:r>
+              <a:rPr sz="3300" b="0" i="0" spc="-66" lang="ko-KR" altLang="en-US">
                 <a:solidFill>
                   <a:srgbClr val="121416"/>
                 </a:solidFill>
@@ -6523,46 +8741,46 @@
                 <a:ea typeface="Noto Sans KR W500"/>
                 <a:cs typeface="Noto Sans KR W500"/>
               </a:rPr>
-              <a:t>양쪽 높이를</a:t>
-            </a:r>
-          </a:p>
-        </p:txBody>
-      </p:sp>
-      <p:sp>
-        <p:nvSpPr>
-          <p:cNvPr id="12" name="07_body_10"/>
-          <p:cNvSpPr txBox="1"/>
-          <p:nvPr/>
-        </p:nvSpPr>
-        <p:spPr>
-          <a:xfrm>
-            <a:off x="5894040" y="11024027"/>
-            <a:ext cx="2918520" cy="495300"/>
-          </a:xfrm>
-          <a:prstGeom prst="rect">
-            <a:avLst/>
-          </a:prstGeom>
-          <a:noFill/>
-        </p:spPr>
-        <p:txBody>
-          <a:bodyPr wrap="none" lIns="0" rIns="0" tIns="0" bIns="0" anchor="t">
-            <a:noAutofit/>
-          </a:bodyPr>
-          <a:lstStyle/>
-          <a:p>
-            <a:pPr algn="ctr">
-              <a:lnSpc>
-                <a:spcPct val="100000"/>
-              </a:lnSpc>
-              <a:spcBef>
-                <a:spcPts val="0"/>
-              </a:spcBef>
-              <a:spcAft>
-                <a:spcPts val="0"/>
-              </a:spcAft>
-            </a:pPr>
-            <a:r>
-              <a:rPr sz="3000" b="0" i="0" spc="-60" lang="ko-KR" altLang="en-US">
+              <a:t>발목에 중량을 달고 앉아서</a:t>
+            </a:r>
+          </a:p>
+        </p:txBody>
+      </p:sp>
+      <p:sp>
+        <p:nvSpPr>
+          <p:cNvPr id="17" name="07_abs_14"/>
+          <p:cNvSpPr txBox="1"/>
+          <p:nvPr/>
+        </p:nvSpPr>
+        <p:spPr>
+          <a:xfrm>
+            <a:off x="2779216" y="10718947"/>
+            <a:ext cx="4728418" cy="544830"/>
+          </a:xfrm>
+          <a:prstGeom prst="rect">
+            <a:avLst/>
+          </a:prstGeom>
+          <a:noFill/>
+        </p:spPr>
+        <p:txBody>
+          <a:bodyPr wrap="none" lIns="0" rIns="0" tIns="0" bIns="0" anchor="t">
+            <a:noAutofit/>
+          </a:bodyPr>
+          <a:lstStyle/>
+          <a:p>
+            <a:pPr algn="ctr">
+              <a:lnSpc>
+                <a:spcPct val="100000"/>
+              </a:lnSpc>
+              <a:spcBef>
+                <a:spcPts val="0"/>
+              </a:spcBef>
+              <a:spcAft>
+                <a:spcPts val="0"/>
+              </a:spcAft>
+            </a:pPr>
+            <a:r>
+              <a:rPr sz="3300" b="0" i="0" spc="-66" lang="ko-KR" altLang="en-US">
                 <a:solidFill>
                   <a:srgbClr val="121416"/>
                 </a:solidFill>
@@ -6570,14 +8788,14 @@
                 <a:ea typeface="Noto Sans KR W500"/>
                 <a:cs typeface="Noto Sans KR W500"/>
               </a:rPr>
-              <a:t>수평으로 유지</a:t>
-            </a:r>
-          </a:p>
-        </p:txBody>
-      </p:sp>
-      <p:sp>
-        <p:nvSpPr>
-          <p:cNvPr id="13" name="07_B01프레임"/>
+              <a:t>무릎 45°에서 멈춥니다.</a:t>
+            </a:r>
+          </a:p>
+        </p:txBody>
+      </p:sp>
+      <p:sp>
+        <p:nvSpPr>
+          <p:cNvPr id="18" name="07_B01프레임"/>
           <p:cNvSpPr/>
           <p:nvPr/>
         </p:nvSpPr>
@@ -6635,22 +8853,22 @@
       <p:grpSpPr/>
       <p:sp>
         <p:nvSpPr>
-          <p:cNvPr id="2" name="08_구간막대_1"/>
+          <p:cNvPr id="2" name="08_그림배경_1"/>
           <p:cNvSpPr/>
           <p:nvPr/>
         </p:nvSpPr>
         <p:spPr>
           <a:xfrm>
-            <a:off x="914400" y="3444180"/>
-            <a:ext cx="4210050" cy="800100"/>
+            <a:off x="914400" y="4767560"/>
+            <a:ext cx="8458200" cy="3143250"/>
           </a:xfrm>
           <a:prstGeom prst="roundRect">
             <a:avLst>
-              <a:gd name="adj" fmla="val 0"/>
+              <a:gd name="adj" fmla="val 7272"/>
             </a:avLst>
           </a:prstGeom>
           <a:solidFill>
-            <a:srgbClr val="121416"/>
+            <a:srgbClr val="F0F7FC"/>
           </a:solidFill>
           <a:ln>
             <a:noFill/>
@@ -6665,16 +8883,485 @@
           </a:p>
         </p:txBody>
       </p:sp>
-      <p:sp>
-        <p:nvSpPr>
-          <p:cNvPr id="3" name="08_구간막대_2"/>
+      <p:pic>
+        <p:nvPicPr>
+          <p:cNvPr id="3" name="08_도식" descr="c08-pic1.png"/>
+          <p:cNvPicPr>
+            <a:picLocks noChangeAspect="1"/>
+          </p:cNvPicPr>
+          <p:nvPr/>
+        </p:nvPicPr>
+        <p:blipFill>
+          <a:blip r:embed="rId2"/>
+          <a:stretch>
+            <a:fillRect/>
+          </a:stretch>
+        </p:blipFill>
+        <p:spPr>
+          <a:xfrm>
+            <a:off x="914400" y="4767560"/>
+            <a:ext cx="8458200" cy="3143250"/>
+          </a:xfrm>
+          <a:prstGeom prst="rect">
+            <a:avLst/>
+          </a:prstGeom>
+        </p:spPr>
+      </p:pic>
+      <p:sp>
+        <p:nvSpPr>
+          <p:cNvPr id="4" name="08_headline_01"/>
+          <p:cNvSpPr txBox="1"/>
+          <p:nvPr/>
+        </p:nvSpPr>
+        <p:spPr>
+          <a:xfrm>
+            <a:off x="2540198" y="997077"/>
+            <a:ext cx="5206603" cy="1040130"/>
+          </a:xfrm>
+          <a:prstGeom prst="rect">
+            <a:avLst/>
+          </a:prstGeom>
+          <a:noFill/>
+        </p:spPr>
+        <p:txBody>
+          <a:bodyPr wrap="none" lIns="0" rIns="0" tIns="0" bIns="0" anchor="t">
+            <a:noAutofit/>
+          </a:bodyPr>
+          <a:lstStyle/>
+          <a:p>
+            <a:pPr algn="ctr">
+              <a:lnSpc>
+                <a:spcPct val="100000"/>
+              </a:lnSpc>
+              <a:spcBef>
+                <a:spcPts val="0"/>
+              </a:spcBef>
+              <a:spcAft>
+                <a:spcPts val="0"/>
+              </a:spcAft>
+            </a:pPr>
+            <a:r>
+              <a:rPr sz="6300" b="0" i="0" spc="-220" lang="ko-KR" altLang="en-US">
+                <a:solidFill>
+                  <a:srgbClr val="121416"/>
+                </a:solidFill>
+                <a:latin typeface="Noto Sans KR W850"/>
+                <a:ea typeface="Noto Sans KR W850"/>
+                <a:cs typeface="Noto Sans KR W850"/>
+              </a:rPr>
+              <a:t>움직임 패턴은</a:t>
+            </a:r>
+          </a:p>
+        </p:txBody>
+      </p:sp>
+      <p:sp>
+        <p:nvSpPr>
+          <p:cNvPr id="5" name="08_headline_02"/>
+          <p:cNvSpPr txBox="1"/>
+          <p:nvPr/>
+        </p:nvSpPr>
+        <p:spPr>
+          <a:xfrm>
+            <a:off x="2638127" y="1957167"/>
+            <a:ext cx="5010745" cy="1040130"/>
+          </a:xfrm>
+          <a:prstGeom prst="rect">
+            <a:avLst/>
+          </a:prstGeom>
+          <a:noFill/>
+        </p:spPr>
+        <p:txBody>
+          <a:bodyPr wrap="none" lIns="0" rIns="0" tIns="0" bIns="0" anchor="t">
+            <a:noAutofit/>
+          </a:bodyPr>
+          <a:lstStyle/>
+          <a:p>
+            <a:pPr algn="ctr">
+              <a:lnSpc>
+                <a:spcPct val="100000"/>
+              </a:lnSpc>
+              <a:spcBef>
+                <a:spcPts val="0"/>
+              </a:spcBef>
+              <a:spcAft>
+                <a:spcPts val="0"/>
+              </a:spcAft>
+            </a:pPr>
+            <a:r>
+              <a:rPr sz="6300" b="0" i="0" spc="-220" lang="ko-KR" altLang="en-US">
+                <a:solidFill>
+                  <a:srgbClr val="0879D8"/>
+                </a:solidFill>
+                <a:latin typeface="Noto Sans KR W850"/>
+                <a:ea typeface="Noto Sans KR W850"/>
+                <a:cs typeface="Noto Sans KR W850"/>
+              </a:rPr>
+              <a:t>엉덩관절</a:t>
+            </a:r>
+            <a:r>
+              <a:rPr sz="6300" b="0" i="0" spc="-220" lang="ko-KR" altLang="en-US">
+                <a:solidFill>
+                  <a:srgbClr val="121416"/>
+                </a:solidFill>
+                <a:latin typeface="Noto Sans KR W850"/>
+                <a:ea typeface="Noto Sans KR W850"/>
+                <a:cs typeface="Noto Sans KR W850"/>
+              </a:rPr>
+              <a:t>에서</a:t>
+            </a:r>
+          </a:p>
+        </p:txBody>
+      </p:sp>
+      <p:sp>
+        <p:nvSpPr>
+          <p:cNvPr id="6" name="08_body_03"/>
+          <p:cNvSpPr txBox="1"/>
+          <p:nvPr/>
+        </p:nvSpPr>
+        <p:spPr>
+          <a:xfrm>
+            <a:off x="2409230" y="3281112"/>
+            <a:ext cx="5468541" cy="544830"/>
+          </a:xfrm>
+          <a:prstGeom prst="rect">
+            <a:avLst/>
+          </a:prstGeom>
+          <a:noFill/>
+        </p:spPr>
+        <p:txBody>
+          <a:bodyPr wrap="none" lIns="0" rIns="0" tIns="0" bIns="0" anchor="t">
+            <a:noAutofit/>
+          </a:bodyPr>
+          <a:lstStyle/>
+          <a:p>
+            <a:pPr algn="ctr">
+              <a:lnSpc>
+                <a:spcPct val="100000"/>
+              </a:lnSpc>
+              <a:spcBef>
+                <a:spcPts val="0"/>
+              </a:spcBef>
+              <a:spcAft>
+                <a:spcPts val="0"/>
+              </a:spcAft>
+            </a:pPr>
+            <a:r>
+              <a:rPr sz="3300" b="0" i="0" spc="-66" lang="ko-KR" altLang="en-US">
+                <a:solidFill>
+                  <a:srgbClr val="121416"/>
+                </a:solidFill>
+                <a:latin typeface="Noto Sans KR W500"/>
+                <a:ea typeface="Noto Sans KR W500"/>
+                <a:cs typeface="Noto Sans KR W500"/>
+              </a:rPr>
+              <a:t>1탄에서 본 몸통 기울어짐과</a:t>
+            </a:r>
+          </a:p>
+        </p:txBody>
+      </p:sp>
+      <p:sp>
+        <p:nvSpPr>
+          <p:cNvPr id="7" name="08_body_04"/>
+          <p:cNvSpPr txBox="1"/>
+          <p:nvPr/>
+        </p:nvSpPr>
+        <p:spPr>
+          <a:xfrm>
+            <a:off x="2088803" y="3876127"/>
+            <a:ext cx="6109395" cy="544830"/>
+          </a:xfrm>
+          <a:prstGeom prst="rect">
+            <a:avLst/>
+          </a:prstGeom>
+          <a:noFill/>
+        </p:spPr>
+        <p:txBody>
+          <a:bodyPr wrap="none" lIns="0" rIns="0" tIns="0" bIns="0" anchor="t">
+            <a:noAutofit/>
+          </a:bodyPr>
+          <a:lstStyle/>
+          <a:p>
+            <a:pPr algn="ctr">
+              <a:lnSpc>
+                <a:spcPct val="100000"/>
+              </a:lnSpc>
+              <a:spcBef>
+                <a:spcPts val="0"/>
+              </a:spcBef>
+              <a:spcAft>
+                <a:spcPts val="0"/>
+              </a:spcAft>
+            </a:pPr>
+            <a:r>
+              <a:rPr sz="3300" b="0" i="0" spc="-66" lang="ko-KR" altLang="en-US">
+                <a:solidFill>
+                  <a:srgbClr val="121416"/>
+                </a:solidFill>
+                <a:latin typeface="Noto Sans KR W500"/>
+                <a:ea typeface="Noto Sans KR W500"/>
+                <a:cs typeface="Noto Sans KR W500"/>
+              </a:rPr>
+              <a:t>허벅지가 안으로 모이는 움직임,</a:t>
+            </a:r>
+          </a:p>
+        </p:txBody>
+      </p:sp>
+      <p:sp>
+        <p:nvSpPr>
+          <p:cNvPr id="8" name="08_key_05"/>
+          <p:cNvSpPr txBox="1"/>
+          <p:nvPr/>
+        </p:nvSpPr>
+        <p:spPr>
+          <a:xfrm>
+            <a:off x="2434530" y="8282666"/>
+            <a:ext cx="5417939" cy="643890"/>
+          </a:xfrm>
+          <a:prstGeom prst="rect">
+            <a:avLst/>
+          </a:prstGeom>
+          <a:noFill/>
+        </p:spPr>
+        <p:txBody>
+          <a:bodyPr wrap="none" lIns="0" rIns="0" tIns="0" bIns="0" anchor="t">
+            <a:noAutofit/>
+          </a:bodyPr>
+          <a:lstStyle/>
+          <a:p>
+            <a:pPr algn="ctr">
+              <a:lnSpc>
+                <a:spcPct val="100000"/>
+              </a:lnSpc>
+              <a:spcBef>
+                <a:spcPts val="0"/>
+              </a:spcBef>
+              <a:spcAft>
+                <a:spcPts val="0"/>
+              </a:spcAft>
+            </a:pPr>
+            <a:r>
+              <a:rPr sz="3900" b="0" i="0" spc="-117" lang="ko-KR" altLang="en-US">
+                <a:solidFill>
+                  <a:srgbClr val="121416"/>
+                </a:solidFill>
+                <a:latin typeface="Noto Sans KR W800"/>
+                <a:ea typeface="Noto Sans KR W800"/>
+                <a:cs typeface="Noto Sans KR W800"/>
+              </a:rPr>
+              <a:t>싱글 레그 데드리프트로</a:t>
+            </a:r>
+          </a:p>
+        </p:txBody>
+      </p:sp>
+      <p:sp>
+        <p:nvSpPr>
+          <p:cNvPr id="9" name="08_key_06"/>
+          <p:cNvSpPr txBox="1"/>
+          <p:nvPr/>
+        </p:nvSpPr>
+        <p:spPr>
+          <a:xfrm>
+            <a:off x="2372618" y="8926497"/>
+            <a:ext cx="5541764" cy="643890"/>
+          </a:xfrm>
+          <a:prstGeom prst="rect">
+            <a:avLst/>
+          </a:prstGeom>
+          <a:noFill/>
+        </p:spPr>
+        <p:txBody>
+          <a:bodyPr wrap="none" lIns="0" rIns="0" tIns="0" bIns="0" anchor="t">
+            <a:noAutofit/>
+          </a:bodyPr>
+          <a:lstStyle/>
+          <a:p>
+            <a:pPr algn="ctr">
+              <a:lnSpc>
+                <a:spcPct val="100000"/>
+              </a:lnSpc>
+              <a:spcBef>
+                <a:spcPts val="0"/>
+              </a:spcBef>
+              <a:spcAft>
+                <a:spcPts val="0"/>
+              </a:spcAft>
+            </a:pPr>
+            <a:r>
+              <a:rPr sz="3900" b="0" i="0" spc="-117" lang="ko-KR" altLang="en-US">
+                <a:solidFill>
+                  <a:srgbClr val="121416"/>
+                </a:solidFill>
+                <a:latin typeface="Noto Sans KR W800"/>
+                <a:ea typeface="Noto Sans KR W800"/>
+                <a:cs typeface="Noto Sans KR W800"/>
+              </a:rPr>
+              <a:t>한 발 조절을 연습합니다</a:t>
+            </a:r>
+          </a:p>
+        </p:txBody>
+      </p:sp>
+      <p:sp>
+        <p:nvSpPr>
+          <p:cNvPr id="10" name="08_body_07"/>
+          <p:cNvSpPr txBox="1"/>
+          <p:nvPr/>
+        </p:nvSpPr>
+        <p:spPr>
+          <a:xfrm>
+            <a:off x="1036886" y="9797403"/>
+            <a:ext cx="8213229" cy="544830"/>
+          </a:xfrm>
+          <a:prstGeom prst="rect">
+            <a:avLst/>
+          </a:prstGeom>
+          <a:noFill/>
+        </p:spPr>
+        <p:txBody>
+          <a:bodyPr wrap="none" lIns="0" rIns="0" tIns="0" bIns="0" anchor="t">
+            <a:noAutofit/>
+          </a:bodyPr>
+          <a:lstStyle/>
+          <a:p>
+            <a:pPr algn="ctr">
+              <a:lnSpc>
+                <a:spcPct val="100000"/>
+              </a:lnSpc>
+              <a:spcBef>
+                <a:spcPts val="0"/>
+              </a:spcBef>
+              <a:spcAft>
+                <a:spcPts val="0"/>
+              </a:spcAft>
+            </a:pPr>
+            <a:r>
+              <a:rPr sz="3300" b="0" i="0" spc="-66" lang="ko-KR" altLang="en-US">
+                <a:solidFill>
+                  <a:srgbClr val="121416"/>
+                </a:solidFill>
+                <a:latin typeface="Noto Sans KR W500"/>
+                <a:ea typeface="Noto Sans KR W500"/>
+                <a:cs typeface="Noto Sans KR W500"/>
+              </a:rPr>
+              <a:t>엉덩이 근육을 크게 쓰는 동작으로 보고되고,</a:t>
+            </a:r>
+          </a:p>
+        </p:txBody>
+      </p:sp>
+      <p:sp>
+        <p:nvSpPr>
+          <p:cNvPr id="11" name="08_body_08"/>
+          <p:cNvSpPr txBox="1"/>
+          <p:nvPr/>
+        </p:nvSpPr>
+        <p:spPr>
+          <a:xfrm>
+            <a:off x="1407765" y="10392418"/>
+            <a:ext cx="7471470" cy="544830"/>
+          </a:xfrm>
+          <a:prstGeom prst="rect">
+            <a:avLst/>
+          </a:prstGeom>
+          <a:noFill/>
+        </p:spPr>
+        <p:txBody>
+          <a:bodyPr wrap="none" lIns="0" rIns="0" tIns="0" bIns="0" anchor="t">
+            <a:noAutofit/>
+          </a:bodyPr>
+          <a:lstStyle/>
+          <a:p>
+            <a:pPr algn="ctr">
+              <a:lnSpc>
+                <a:spcPct val="100000"/>
+              </a:lnSpc>
+              <a:spcBef>
+                <a:spcPts val="0"/>
+              </a:spcBef>
+              <a:spcAft>
+                <a:spcPts val="0"/>
+              </a:spcAft>
+            </a:pPr>
+            <a:r>
+              <a:rPr sz="3300" b="0" i="0" spc="-66" lang="ko-KR" altLang="en-US">
+                <a:solidFill>
+                  <a:srgbClr val="121416"/>
+                </a:solidFill>
+                <a:latin typeface="Noto Sans KR W500"/>
+                <a:ea typeface="Noto Sans KR W500"/>
+                <a:cs typeface="Noto Sans KR W500"/>
+              </a:rPr>
+              <a:t>엉덩관절+무릎 운동 병행이 권장됩니다.</a:t>
+            </a:r>
+          </a:p>
+        </p:txBody>
+      </p:sp>
+      <p:sp>
+        <p:nvSpPr>
+          <p:cNvPr id="12" name="08_B01프레임"/>
           <p:cNvSpPr/>
           <p:nvPr/>
         </p:nvSpPr>
         <p:spPr>
           <a:xfrm>
-            <a:off x="5162550" y="3444180"/>
-            <a:ext cx="4210050" cy="800100"/>
+            <a:off x="323850" y="323850"/>
+            <a:ext cx="9639300" cy="12211050"/>
+          </a:xfrm>
+          <a:prstGeom prst="roundRect">
+            <a:avLst>
+              <a:gd name="adj" fmla="val 2766"/>
+            </a:avLst>
+          </a:prstGeom>
+          <a:noFill/>
+          <a:ln w="19050">
+            <a:solidFill>
+              <a:srgbClr val="D0DCE5"/>
+            </a:solidFill>
+          </a:ln>
+          <a:effectLst/>
+        </p:spPr>
+        <p:txBody>
+          <a:bodyPr rtlCol="0" anchor="ctr"/>
+          <a:lstStyle/>
+          <a:p>
+            <a:pPr algn="ctr"/>
+          </a:p>
+        </p:txBody>
+      </p:sp>
+    </p:spTree>
+  </p:cSld>
+  <p:clrMapOvr>
+    <a:masterClrMapping/>
+  </p:clrMapOvr>
+</p:sld>
+</file>
+
+<file path=ppt/slides/slide9.xml><?xml version="1.0" encoding="utf-8"?>
+<p:sld xmlns:a="http://schemas.openxmlformats.org/drawingml/2006/main" xmlns:p="http://schemas.openxmlformats.org/presentationml/2006/main" xmlns:r="http://schemas.openxmlformats.org/officeDocument/2006/relationships">
+  <p:cSld>
+    <p:bg>
+      <p:bgPr>
+        <a:solidFill>
+          <a:srgbClr val="FFFFFF"/>
+        </a:solidFill>
+        <a:effectLst/>
+      </p:bgPr>
+    </p:bg>
+    <p:spTree>
+      <p:nvGrpSpPr>
+        <p:cNvPr id="1" name=""/>
+        <p:cNvGrpSpPr/>
+        <p:nvPr/>
+      </p:nvGrpSpPr>
+      <p:grpSpPr/>
+      <p:sp>
+        <p:nvSpPr>
+          <p:cNvPr id="2" name="09_사진영상자리_09-1"/>
+          <p:cNvSpPr/>
+          <p:nvPr/>
+        </p:nvSpPr>
+        <p:spPr>
+          <a:xfrm>
+            <a:off x="1028700" y="3238500"/>
+            <a:ext cx="8229600" cy="4629150"/>
           </a:xfrm>
           <a:prstGeom prst="roundRect">
             <a:avLst>
@@ -6682,10 +9369,13 @@
             </a:avLst>
           </a:prstGeom>
           <a:solidFill>
-            <a:srgbClr val="0879D8"/>
+            <a:srgbClr val="F3F5F7"/>
           </a:solidFill>
-          <a:ln>
-            <a:noFill/>
+          <a:ln w="28575">
+            <a:solidFill>
+              <a:srgbClr val="B9C4CF"/>
+            </a:solidFill>
+            <a:prstDash val="dash"/>
           </a:ln>
           <a:effectLst/>
         </p:spPr>
@@ -6699,14 +9389,14 @@
       </p:sp>
       <p:sp>
         <p:nvSpPr>
-          <p:cNvPr id="4" name="08_headline_01"/>
-          <p:cNvSpPr txBox="1"/>
-          <p:nvPr/>
-        </p:nvSpPr>
-        <p:spPr>
-          <a:xfrm>
-            <a:off x="1511647" y="997077"/>
-            <a:ext cx="7263705" cy="1040130"/>
+          <p:cNvPr id="3" name="09_headline_01"/>
+          <p:cNvSpPr txBox="1"/>
+          <p:nvPr/>
+        </p:nvSpPr>
+        <p:spPr>
+          <a:xfrm>
+            <a:off x="1255514" y="997077"/>
+            <a:ext cx="7775823" cy="1040130"/>
           </a:xfrm>
           <a:prstGeom prst="rect">
             <a:avLst/>
@@ -6739,21 +9429,21 @@
                 <a:ea typeface="Noto Sans KR W850"/>
                 <a:cs typeface="Noto Sans KR W850"/>
               </a:rPr>
-              <a:t>무릎 앞이 아픈 러너,</a:t>
-            </a:r>
-          </a:p>
-        </p:txBody>
-      </p:sp>
-      <p:sp>
-        <p:nvSpPr>
-          <p:cNvPr id="5" name="08_headline_02"/>
-          <p:cNvSpPr txBox="1"/>
-          <p:nvPr/>
-        </p:nvSpPr>
-        <p:spPr>
-          <a:xfrm>
-            <a:off x="1832074" y="1957167"/>
-            <a:ext cx="6622852" cy="1040130"/>
+              <a:t>싱글 레그 데드리프트,</a:t>
+            </a:r>
+          </a:p>
+        </p:txBody>
+      </p:sp>
+      <p:sp>
+        <p:nvSpPr>
+          <p:cNvPr id="4" name="09_headline_02"/>
+          <p:cNvSpPr txBox="1"/>
+          <p:nvPr/>
+        </p:nvSpPr>
+        <p:spPr>
+          <a:xfrm>
+            <a:off x="2894112" y="1957167"/>
+            <a:ext cx="4498628" cy="1040130"/>
           </a:xfrm>
           <a:prstGeom prst="rect">
             <a:avLst/>
@@ -6786,7 +9476,7 @@
                 <a:ea typeface="Noto Sans KR W850"/>
                 <a:cs typeface="Noto Sans KR W850"/>
               </a:rPr>
-              <a:t>이렇게 시작</a:t>
+              <a:t>옆에서</a:t>
             </a:r>
             <a:r>
               <a:rPr sz="6300" b="0" i="0" spc="-220" lang="ko-KR" altLang="en-US">
@@ -6797,21 +9487,68 @@
                 <a:ea typeface="Noto Sans KR W850"/>
                 <a:cs typeface="Noto Sans KR W850"/>
               </a:rPr>
-              <a:t>합니다</a:t>
-            </a:r>
-          </a:p>
-        </p:txBody>
-      </p:sp>
-      <p:sp>
-        <p:nvSpPr>
-          <p:cNvPr id="6" name="08_div_03"/>
-          <p:cNvSpPr txBox="1"/>
-          <p:nvPr/>
-        </p:nvSpPr>
-        <p:spPr>
-          <a:xfrm>
-            <a:off x="1707952" y="3623250"/>
-            <a:ext cx="2622798" cy="495300"/>
+              <a:t> 보기</a:t>
+            </a:r>
+          </a:p>
+        </p:txBody>
+      </p:sp>
+      <p:sp>
+        <p:nvSpPr>
+          <p:cNvPr id="5" name="09_g-tag_03"/>
+          <p:cNvSpPr txBox="1"/>
+          <p:nvPr/>
+        </p:nvSpPr>
+        <p:spPr>
+          <a:xfrm>
+            <a:off x="3835896" y="4810566"/>
+            <a:ext cx="2615208" cy="396240"/>
+          </a:xfrm>
+          <a:prstGeom prst="rect">
+            <a:avLst/>
+          </a:prstGeom>
+          <a:noFill/>
+        </p:spPr>
+        <p:txBody>
+          <a:bodyPr wrap="none" lIns="0" rIns="0" tIns="0" bIns="0" anchor="t">
+            <a:noAutofit/>
+          </a:bodyPr>
+          <a:lstStyle/>
+          <a:p>
+            <a:pPr algn="ctr">
+              <a:lnSpc>
+                <a:spcPct val="100000"/>
+              </a:lnSpc>
+              <a:spcBef>
+                <a:spcPts val="0"/>
+              </a:spcBef>
+              <a:spcAft>
+                <a:spcPts val="0"/>
+              </a:spcAft>
+            </a:pPr>
+            <a:r>
+              <a:rPr sz="2400" b="0" i="0" spc="0" lang="ko-KR" altLang="en-US">
+                <a:solidFill>
+                  <a:srgbClr val="0879D8"/>
+                </a:solidFill>
+                <a:latin typeface="Noto Sans KR W700"/>
+                <a:ea typeface="Noto Sans KR W700"/>
+                <a:cs typeface="Noto Sans KR W700"/>
+              </a:rPr>
+              <a:t>영상 넣는 자리</a:t>
+            </a:r>
+          </a:p>
+        </p:txBody>
+      </p:sp>
+      <p:sp>
+        <p:nvSpPr>
+          <p:cNvPr id="6" name="09_strong_04"/>
+          <p:cNvSpPr txBox="1"/>
+          <p:nvPr/>
+        </p:nvSpPr>
+        <p:spPr>
+          <a:xfrm>
+            <a:off x="2556421" y="5307390"/>
+            <a:ext cx="5174010" cy="495300"/>
           </a:xfrm>
           <a:prstGeom prst="rect">
             <a:avLst/>
@@ -6838,240 +9575,287 @@
             <a:r>
               <a:rPr sz="3000" b="0" i="0" spc="-60" lang="ko-KR" altLang="en-US">
                 <a:solidFill>
-                  <a:srgbClr val="FFFFFF"/>
+                  <a:srgbClr val="121416"/>
                 </a:solidFill>
                 <a:latin typeface="Noto Sans KR W800"/>
                 <a:ea typeface="Noto Sans KR W800"/>
                 <a:cs typeface="Noto Sans KR W800"/>
               </a:rPr>
-              <a:t>CKC 스쿼트</a:t>
-            </a:r>
-          </a:p>
-        </p:txBody>
-      </p:sp>
-      <p:sp>
-        <p:nvSpPr>
-          <p:cNvPr id="7" name="08_div_04"/>
-          <p:cNvSpPr txBox="1"/>
-          <p:nvPr/>
-        </p:nvSpPr>
-        <p:spPr>
-          <a:xfrm>
-            <a:off x="5713065" y="3623250"/>
-            <a:ext cx="3108871" cy="495300"/>
-          </a:xfrm>
-          <a:prstGeom prst="rect">
-            <a:avLst/>
-          </a:prstGeom>
-          <a:noFill/>
-        </p:spPr>
-        <p:txBody>
-          <a:bodyPr wrap="none" lIns="0" rIns="0" tIns="0" bIns="0" anchor="t">
-            <a:noAutofit/>
-          </a:bodyPr>
-          <a:lstStyle/>
-          <a:p>
-            <a:pPr algn="ctr">
-              <a:lnSpc>
-                <a:spcPct val="100000"/>
-              </a:lnSpc>
-              <a:spcBef>
-                <a:spcPts val="0"/>
-              </a:spcBef>
-              <a:spcAft>
-                <a:spcPts val="0"/>
-              </a:spcAft>
-            </a:pPr>
-            <a:r>
-              <a:rPr sz="3000" b="0" i="0" spc="-60" lang="ko-KR" altLang="en-US">
-                <a:solidFill>
-                  <a:srgbClr val="FFFFFF"/>
+              <a:t>싱글 레그 데드리프트 옆모습</a:t>
+            </a:r>
+          </a:p>
+        </p:txBody>
+      </p:sp>
+      <p:sp>
+        <p:nvSpPr>
+          <p:cNvPr id="7" name="09_g-spec_05"/>
+          <p:cNvSpPr txBox="1"/>
+          <p:nvPr/>
+        </p:nvSpPr>
+        <p:spPr>
+          <a:xfrm>
+            <a:off x="2837855" y="5915466"/>
+            <a:ext cx="4611142" cy="396240"/>
+          </a:xfrm>
+          <a:prstGeom prst="rect">
+            <a:avLst/>
+          </a:prstGeom>
+          <a:noFill/>
+        </p:spPr>
+        <p:txBody>
+          <a:bodyPr wrap="none" lIns="0" rIns="0" tIns="0" bIns="0" anchor="t">
+            <a:noAutofit/>
+          </a:bodyPr>
+          <a:lstStyle/>
+          <a:p>
+            <a:pPr algn="ctr">
+              <a:lnSpc>
+                <a:spcPct val="100000"/>
+              </a:lnSpc>
+              <a:spcBef>
+                <a:spcPts val="0"/>
+              </a:spcBef>
+              <a:spcAft>
+                <a:spcPts val="0"/>
+              </a:spcAft>
+            </a:pPr>
+            <a:r>
+              <a:rPr sz="2400" b="0" i="0" spc="0" lang="ko-KR" altLang="en-US">
+                <a:solidFill>
+                  <a:srgbClr val="5E6570"/>
+                </a:solidFill>
+                <a:latin typeface="Noto Sans KR W500"/>
+                <a:ea typeface="Noto Sans KR W500"/>
+                <a:cs typeface="Noto Sans KR W500"/>
+              </a:rPr>
+              <a:t>가로 16:9 · 머리부터 발끝까지</a:t>
+            </a:r>
+          </a:p>
+        </p:txBody>
+      </p:sp>
+      <p:sp>
+        <p:nvSpPr>
+          <p:cNvPr id="8" name="09_abs_06"/>
+          <p:cNvSpPr txBox="1"/>
+          <p:nvPr/>
+        </p:nvSpPr>
+        <p:spPr>
+          <a:xfrm>
+            <a:off x="3227933" y="8221599"/>
+            <a:ext cx="3830985" cy="718185"/>
+          </a:xfrm>
+          <a:prstGeom prst="rect">
+            <a:avLst/>
+          </a:prstGeom>
+          <a:noFill/>
+        </p:spPr>
+        <p:txBody>
+          <a:bodyPr wrap="none" lIns="0" rIns="0" tIns="0" bIns="0" anchor="t">
+            <a:noAutofit/>
+          </a:bodyPr>
+          <a:lstStyle/>
+          <a:p>
+            <a:pPr algn="ctr">
+              <a:lnSpc>
+                <a:spcPct val="100000"/>
+              </a:lnSpc>
+              <a:spcBef>
+                <a:spcPts val="0"/>
+              </a:spcBef>
+              <a:spcAft>
+                <a:spcPts val="0"/>
+              </a:spcAft>
+            </a:pPr>
+            <a:r>
+              <a:rPr sz="4350" b="0" i="0" spc="-152" lang="ko-KR" altLang="en-US">
+                <a:solidFill>
+                  <a:srgbClr val="121416"/>
+                </a:solidFill>
+                <a:latin typeface="Noto Sans KR W850"/>
+                <a:ea typeface="Noto Sans KR W850"/>
+                <a:cs typeface="Noto Sans KR W850"/>
+              </a:rPr>
+              <a:t>엉덩이가 먼저</a:t>
+            </a:r>
+          </a:p>
+        </p:txBody>
+      </p:sp>
+      <p:sp>
+        <p:nvSpPr>
+          <p:cNvPr id="9" name="09_abs_07"/>
+          <p:cNvSpPr txBox="1"/>
+          <p:nvPr/>
+        </p:nvSpPr>
+        <p:spPr>
+          <a:xfrm>
+            <a:off x="3335238" y="8906506"/>
+            <a:ext cx="3616523" cy="718185"/>
+          </a:xfrm>
+          <a:prstGeom prst="rect">
+            <a:avLst/>
+          </a:prstGeom>
+          <a:noFill/>
+        </p:spPr>
+        <p:txBody>
+          <a:bodyPr wrap="none" lIns="0" rIns="0" tIns="0" bIns="0" anchor="t">
+            <a:noAutofit/>
+          </a:bodyPr>
+          <a:lstStyle/>
+          <a:p>
+            <a:pPr algn="ctr">
+              <a:lnSpc>
+                <a:spcPct val="100000"/>
+              </a:lnSpc>
+              <a:spcBef>
+                <a:spcPts val="0"/>
+              </a:spcBef>
+              <a:spcAft>
+                <a:spcPts val="0"/>
+              </a:spcAft>
+            </a:pPr>
+            <a:r>
+              <a:rPr sz="4350" b="0" i="0" spc="-152" lang="ko-KR" altLang="en-US">
+                <a:solidFill>
+                  <a:srgbClr val="121416"/>
+                </a:solidFill>
+                <a:latin typeface="Noto Sans KR W850"/>
+                <a:ea typeface="Noto Sans KR W850"/>
+                <a:cs typeface="Noto Sans KR W850"/>
+              </a:rPr>
+              <a:t>뒤로 가나요?</a:t>
+            </a:r>
+          </a:p>
+        </p:txBody>
+      </p:sp>
+      <p:sp>
+        <p:nvSpPr>
+          <p:cNvPr id="10" name="09_item-h_08"/>
+          <p:cNvSpPr txBox="1"/>
+          <p:nvPr/>
+        </p:nvSpPr>
+        <p:spPr>
+          <a:xfrm>
+            <a:off x="2366070" y="9933432"/>
+            <a:ext cx="1135112" cy="544830"/>
+          </a:xfrm>
+          <a:prstGeom prst="rect">
+            <a:avLst/>
+          </a:prstGeom>
+          <a:noFill/>
+        </p:spPr>
+        <p:txBody>
+          <a:bodyPr wrap="none" lIns="0" rIns="0" tIns="0" bIns="0" anchor="t">
+            <a:noAutofit/>
+          </a:bodyPr>
+          <a:lstStyle/>
+          <a:p>
+            <a:pPr algn="ctr">
+              <a:lnSpc>
+                <a:spcPct val="100000"/>
+              </a:lnSpc>
+              <a:spcBef>
+                <a:spcPts val="0"/>
+              </a:spcBef>
+              <a:spcAft>
+                <a:spcPts val="0"/>
+              </a:spcAft>
+            </a:pPr>
+            <a:r>
+              <a:rPr sz="3300" b="0" i="0" spc="-99" lang="ko-KR" altLang="en-US">
+                <a:solidFill>
+                  <a:srgbClr val="121416"/>
                 </a:solidFill>
                 <a:latin typeface="Noto Sans KR W800"/>
                 <a:ea typeface="Noto Sans KR W800"/>
                 <a:cs typeface="Noto Sans KR W800"/>
               </a:rPr>
-              <a:t>OKC 발목 중량</a:t>
-            </a:r>
-          </a:p>
-        </p:txBody>
-      </p:sp>
-      <p:sp>
-        <p:nvSpPr>
-          <p:cNvPr id="8" name="08_span_05"/>
-          <p:cNvSpPr txBox="1"/>
-          <p:nvPr/>
-        </p:nvSpPr>
-        <p:spPr>
-          <a:xfrm>
-            <a:off x="533400" y="4365057"/>
-            <a:ext cx="1077516" cy="421005"/>
-          </a:xfrm>
-          <a:prstGeom prst="rect">
-            <a:avLst/>
-          </a:prstGeom>
-          <a:noFill/>
-        </p:spPr>
-        <p:txBody>
-          <a:bodyPr wrap="none" lIns="0" rIns="0" tIns="0" bIns="0" anchor="t">
-            <a:noAutofit/>
-          </a:bodyPr>
-          <a:lstStyle/>
-          <a:p>
-            <a:pPr algn="ctr">
-              <a:lnSpc>
-                <a:spcPct val="100000"/>
-              </a:lnSpc>
-              <a:spcBef>
-                <a:spcPts val="0"/>
-              </a:spcBef>
-              <a:spcAft>
-                <a:spcPts val="0"/>
-              </a:spcAft>
-            </a:pPr>
-            <a:r>
-              <a:rPr sz="2550" b="0" i="0" spc="0" lang="ko-KR" altLang="en-US">
-                <a:solidFill>
-                  <a:srgbClr val="5E6570"/>
-                </a:solidFill>
-                <a:latin typeface="Noto Sans KR W600"/>
-                <a:ea typeface="Noto Sans KR W600"/>
-                <a:cs typeface="Noto Sans KR W600"/>
-              </a:rPr>
-              <a:t>0°</a:t>
-            </a:r>
-          </a:p>
-        </p:txBody>
-      </p:sp>
-      <p:sp>
-        <p:nvSpPr>
-          <p:cNvPr id="9" name="08_span_06"/>
-          <p:cNvSpPr txBox="1"/>
-          <p:nvPr/>
-        </p:nvSpPr>
-        <p:spPr>
-          <a:xfrm>
-            <a:off x="4416921" y="4365057"/>
-            <a:ext cx="1265337" cy="421005"/>
-          </a:xfrm>
-          <a:prstGeom prst="rect">
-            <a:avLst/>
-          </a:prstGeom>
-          <a:noFill/>
-        </p:spPr>
-        <p:txBody>
-          <a:bodyPr wrap="none" lIns="0" rIns="0" tIns="0" bIns="0" anchor="t">
-            <a:noAutofit/>
-          </a:bodyPr>
-          <a:lstStyle/>
-          <a:p>
-            <a:pPr algn="ctr">
-              <a:lnSpc>
-                <a:spcPct val="100000"/>
-              </a:lnSpc>
-              <a:spcBef>
-                <a:spcPts val="0"/>
-              </a:spcBef>
-              <a:spcAft>
-                <a:spcPts val="0"/>
-              </a:spcAft>
-            </a:pPr>
-            <a:r>
-              <a:rPr sz="2550" b="0" i="0" spc="0" lang="ko-KR" altLang="en-US">
-                <a:solidFill>
-                  <a:srgbClr val="5E6570"/>
-                </a:solidFill>
-                <a:latin typeface="Noto Sans KR W600"/>
-                <a:ea typeface="Noto Sans KR W600"/>
-                <a:cs typeface="Noto Sans KR W600"/>
-              </a:rPr>
-              <a:t>45°</a:t>
-            </a:r>
-          </a:p>
-        </p:txBody>
-      </p:sp>
-      <p:sp>
-        <p:nvSpPr>
-          <p:cNvPr id="10" name="08_span_07"/>
-          <p:cNvSpPr txBox="1"/>
-          <p:nvPr/>
-        </p:nvSpPr>
-        <p:spPr>
-          <a:xfrm>
-            <a:off x="8488263" y="4365057"/>
-            <a:ext cx="1265337" cy="421005"/>
-          </a:xfrm>
-          <a:prstGeom prst="rect">
-            <a:avLst/>
-          </a:prstGeom>
-          <a:noFill/>
-        </p:spPr>
-        <p:txBody>
-          <a:bodyPr wrap="none" lIns="0" rIns="0" tIns="0" bIns="0" anchor="t">
-            <a:noAutofit/>
-          </a:bodyPr>
-          <a:lstStyle/>
-          <a:p>
-            <a:pPr algn="ctr">
-              <a:lnSpc>
-                <a:spcPct val="100000"/>
-              </a:lnSpc>
-              <a:spcBef>
-                <a:spcPts val="0"/>
-              </a:spcBef>
-              <a:spcAft>
-                <a:spcPts val="0"/>
-              </a:spcAft>
-            </a:pPr>
-            <a:r>
-              <a:rPr sz="2550" b="0" i="0" spc="0" lang="ko-KR" altLang="en-US">
-                <a:solidFill>
-                  <a:srgbClr val="5E6570"/>
-                </a:solidFill>
-                <a:latin typeface="Noto Sans KR W600"/>
-                <a:ea typeface="Noto Sans KR W600"/>
-                <a:cs typeface="Noto Sans KR W600"/>
-              </a:rPr>
-              <a:t>90°</a:t>
-            </a:r>
-          </a:p>
-        </p:txBody>
-      </p:sp>
-      <p:sp>
-        <p:nvSpPr>
-          <p:cNvPr id="11" name="08_item-h_08"/>
-          <p:cNvSpPr txBox="1"/>
-          <p:nvPr/>
-        </p:nvSpPr>
-        <p:spPr>
-          <a:xfrm>
-            <a:off x="3662065" y="5348799"/>
-            <a:ext cx="2962870" cy="594360"/>
-          </a:xfrm>
-          <a:prstGeom prst="rect">
-            <a:avLst/>
-          </a:prstGeom>
-          <a:noFill/>
-        </p:spPr>
-        <p:txBody>
-          <a:bodyPr wrap="none" lIns="0" rIns="0" tIns="0" bIns="0" anchor="t">
-            <a:noAutofit/>
-          </a:bodyPr>
-          <a:lstStyle/>
-          <a:p>
-            <a:pPr algn="ctr">
-              <a:lnSpc>
-                <a:spcPct val="100000"/>
-              </a:lnSpc>
-              <a:spcBef>
-                <a:spcPts val="0"/>
-              </a:spcBef>
-              <a:spcAft>
-                <a:spcPts val="0"/>
-              </a:spcAft>
-            </a:pPr>
-            <a:r>
-              <a:rPr sz="3600" b="0" i="0" spc="-108" lang="ko-KR" altLang="en-US">
+              <a:t>등</a:t>
+            </a:r>
+          </a:p>
+        </p:txBody>
+      </p:sp>
+      <p:sp>
+        <p:nvSpPr>
+          <p:cNvPr id="11" name="09_body_09"/>
+          <p:cNvSpPr txBox="1"/>
+          <p:nvPr/>
+        </p:nvSpPr>
+        <p:spPr>
+          <a:xfrm>
+            <a:off x="1026319" y="10525006"/>
+            <a:ext cx="3814614" cy="495300"/>
+          </a:xfrm>
+          <a:prstGeom prst="rect">
+            <a:avLst/>
+          </a:prstGeom>
+          <a:noFill/>
+        </p:spPr>
+        <p:txBody>
+          <a:bodyPr wrap="none" lIns="0" rIns="0" tIns="0" bIns="0" anchor="t">
+            <a:noAutofit/>
+          </a:bodyPr>
+          <a:lstStyle/>
+          <a:p>
+            <a:pPr algn="ctr">
+              <a:lnSpc>
+                <a:spcPct val="100000"/>
+              </a:lnSpc>
+              <a:spcBef>
+                <a:spcPts val="0"/>
+              </a:spcBef>
+              <a:spcAft>
+                <a:spcPts val="0"/>
+              </a:spcAft>
+            </a:pPr>
+            <a:r>
+              <a:rPr sz="3000" b="0" i="0" spc="-60" lang="ko-KR" altLang="en-US">
+                <a:solidFill>
+                  <a:srgbClr val="121416"/>
+                </a:solidFill>
+                <a:latin typeface="Noto Sans KR W500"/>
+                <a:ea typeface="Noto Sans KR W500"/>
+                <a:cs typeface="Noto Sans KR W500"/>
+              </a:rPr>
+              <a:t>머리~뒷다리 일직선</a:t>
+            </a:r>
+          </a:p>
+        </p:txBody>
+      </p:sp>
+      <p:sp>
+        <p:nvSpPr>
+          <p:cNvPr id="12" name="09_item-h_10"/>
+          <p:cNvSpPr txBox="1"/>
+          <p:nvPr/>
+        </p:nvSpPr>
+        <p:spPr>
+          <a:xfrm>
+            <a:off x="6173837" y="9933432"/>
+            <a:ext cx="2358777" cy="544830"/>
+          </a:xfrm>
+          <a:prstGeom prst="rect">
+            <a:avLst/>
+          </a:prstGeom>
+          <a:noFill/>
+        </p:spPr>
+        <p:txBody>
+          <a:bodyPr wrap="none" lIns="0" rIns="0" tIns="0" bIns="0" anchor="t">
+            <a:noAutofit/>
+          </a:bodyPr>
+          <a:lstStyle/>
+          <a:p>
+            <a:pPr algn="ctr">
+              <a:lnSpc>
+                <a:spcPct val="100000"/>
+              </a:lnSpc>
+              <a:spcBef>
+                <a:spcPts val="0"/>
+              </a:spcBef>
+              <a:spcAft>
+                <a:spcPts val="0"/>
+              </a:spcAft>
+            </a:pPr>
+            <a:r>
+              <a:rPr sz="3300" b="0" i="0" spc="-99" lang="ko-KR" altLang="en-US">
                 <a:solidFill>
                   <a:srgbClr val="121416"/>
                 </a:solidFill>
@@ -7079,46 +9863,46 @@
                 <a:ea typeface="Noto Sans KR W800"/>
                 <a:cs typeface="Noto Sans KR W800"/>
               </a:rPr>
-              <a:t>얕게는 CKC</a:t>
-            </a:r>
-          </a:p>
-        </p:txBody>
-      </p:sp>
-      <p:sp>
-        <p:nvSpPr>
-          <p:cNvPr id="12" name="08_body_09"/>
-          <p:cNvSpPr txBox="1"/>
-          <p:nvPr/>
-        </p:nvSpPr>
-        <p:spPr>
-          <a:xfrm>
-            <a:off x="2175123" y="6037558"/>
-            <a:ext cx="5936754" cy="544830"/>
-          </a:xfrm>
-          <a:prstGeom prst="rect">
-            <a:avLst/>
-          </a:prstGeom>
-          <a:noFill/>
-        </p:spPr>
-        <p:txBody>
-          <a:bodyPr wrap="none" lIns="0" rIns="0" tIns="0" bIns="0" anchor="t">
-            <a:noAutofit/>
-          </a:bodyPr>
-          <a:lstStyle/>
-          <a:p>
-            <a:pPr algn="ctr">
-              <a:lnSpc>
-                <a:spcPct val="100000"/>
-              </a:lnSpc>
-              <a:spcBef>
-                <a:spcPts val="0"/>
-              </a:spcBef>
-              <a:spcAft>
-                <a:spcPts val="0"/>
-              </a:spcAft>
-            </a:pPr>
-            <a:r>
-              <a:rPr sz="3300" b="0" i="0" spc="-66" lang="ko-KR" altLang="en-US">
+              <a:t>지지 무릎</a:t>
+            </a:r>
+          </a:p>
+        </p:txBody>
+      </p:sp>
+      <p:sp>
+        <p:nvSpPr>
+          <p:cNvPr id="13" name="09_body_11"/>
+          <p:cNvSpPr txBox="1"/>
+          <p:nvPr/>
+        </p:nvSpPr>
+        <p:spPr>
+          <a:xfrm>
+            <a:off x="5623471" y="10525006"/>
+            <a:ext cx="3459510" cy="495300"/>
+          </a:xfrm>
+          <a:prstGeom prst="rect">
+            <a:avLst/>
+          </a:prstGeom>
+          <a:noFill/>
+        </p:spPr>
+        <p:txBody>
+          <a:bodyPr wrap="none" lIns="0" rIns="0" tIns="0" bIns="0" anchor="t">
+            <a:noAutofit/>
+          </a:bodyPr>
+          <a:lstStyle/>
+          <a:p>
+            <a:pPr algn="ctr">
+              <a:lnSpc>
+                <a:spcPct val="100000"/>
+              </a:lnSpc>
+              <a:spcBef>
+                <a:spcPts val="0"/>
+              </a:spcBef>
+              <a:spcAft>
+                <a:spcPts val="0"/>
+              </a:spcAft>
+            </a:pPr>
+            <a:r>
+              <a:rPr sz="3000" b="0" i="0" spc="-60" lang="ko-KR" altLang="en-US">
                 <a:solidFill>
                   <a:srgbClr val="121416"/>
                 </a:solidFill>
@@ -7126,296 +9910,14 @@
                 <a:ea typeface="Noto Sans KR W500"/>
                 <a:cs typeface="Noto Sans KR W500"/>
               </a:rPr>
-              <a:t>스쿼트는 무릎 0~45° 범위에서</a:t>
-            </a:r>
-          </a:p>
-        </p:txBody>
-      </p:sp>
-      <p:sp>
-        <p:nvSpPr>
-          <p:cNvPr id="13" name="08_item-h_10"/>
-          <p:cNvSpPr txBox="1"/>
-          <p:nvPr/>
-        </p:nvSpPr>
-        <p:spPr>
-          <a:xfrm>
-            <a:off x="3635425" y="7014335"/>
-            <a:ext cx="3016002" cy="594360"/>
-          </a:xfrm>
-          <a:prstGeom prst="rect">
-            <a:avLst/>
-          </a:prstGeom>
-          <a:noFill/>
-        </p:spPr>
-        <p:txBody>
-          <a:bodyPr wrap="none" lIns="0" rIns="0" tIns="0" bIns="0" anchor="t">
-            <a:noAutofit/>
-          </a:bodyPr>
-          <a:lstStyle/>
-          <a:p>
-            <a:pPr algn="ctr">
-              <a:lnSpc>
-                <a:spcPct val="100000"/>
-              </a:lnSpc>
-              <a:spcBef>
-                <a:spcPts val="0"/>
-              </a:spcBef>
-              <a:spcAft>
-                <a:spcPts val="0"/>
-              </a:spcAft>
-            </a:pPr>
-            <a:r>
-              <a:rPr sz="3600" b="0" i="0" spc="-108" lang="ko-KR" altLang="en-US">
-                <a:solidFill>
-                  <a:srgbClr val="121416"/>
-                </a:solidFill>
-                <a:latin typeface="Noto Sans KR W800"/>
-                <a:ea typeface="Noto Sans KR W800"/>
-                <a:cs typeface="Noto Sans KR W800"/>
-              </a:rPr>
-              <a:t>깊게는 OKC</a:t>
-            </a:r>
-          </a:p>
-        </p:txBody>
-      </p:sp>
-      <p:sp>
-        <p:nvSpPr>
-          <p:cNvPr id="14" name="08_body_11"/>
-          <p:cNvSpPr txBox="1"/>
-          <p:nvPr/>
-        </p:nvSpPr>
-        <p:spPr>
-          <a:xfrm>
-            <a:off x="1816745" y="7703094"/>
-            <a:ext cx="6653361" cy="544830"/>
-          </a:xfrm>
-          <a:prstGeom prst="rect">
-            <a:avLst/>
-          </a:prstGeom>
-          <a:noFill/>
-        </p:spPr>
-        <p:txBody>
-          <a:bodyPr wrap="none" lIns="0" rIns="0" tIns="0" bIns="0" anchor="t">
-            <a:noAutofit/>
-          </a:bodyPr>
-          <a:lstStyle/>
-          <a:p>
-            <a:pPr algn="ctr">
-              <a:lnSpc>
-                <a:spcPct val="100000"/>
-              </a:lnSpc>
-              <a:spcBef>
-                <a:spcPts val="0"/>
-              </a:spcBef>
-              <a:spcAft>
-                <a:spcPts val="0"/>
-              </a:spcAft>
-            </a:pPr>
-            <a:r>
-              <a:rPr sz="3300" b="0" i="0" spc="-66" lang="ko-KR" altLang="en-US">
-                <a:solidFill>
-                  <a:srgbClr val="121416"/>
-                </a:solidFill>
-                <a:latin typeface="Noto Sans KR W500"/>
-                <a:ea typeface="Noto Sans KR W500"/>
-                <a:cs typeface="Noto Sans KR W500"/>
-              </a:rPr>
-              <a:t>발목 중량 무릎 펴기는 90~45°에서</a:t>
-            </a:r>
-          </a:p>
-        </p:txBody>
-      </p:sp>
-      <p:sp>
-        <p:nvSpPr>
-          <p:cNvPr id="15" name="08_item-h_12"/>
-          <p:cNvSpPr txBox="1"/>
-          <p:nvPr/>
-        </p:nvSpPr>
-        <p:spPr>
-          <a:xfrm>
-            <a:off x="3427363" y="8679871"/>
-            <a:ext cx="3432125" cy="594360"/>
-          </a:xfrm>
-          <a:prstGeom prst="rect">
-            <a:avLst/>
-          </a:prstGeom>
-          <a:noFill/>
-        </p:spPr>
-        <p:txBody>
-          <a:bodyPr wrap="none" lIns="0" rIns="0" tIns="0" bIns="0" anchor="t">
-            <a:noAutofit/>
-          </a:bodyPr>
-          <a:lstStyle/>
-          <a:p>
-            <a:pPr algn="ctr">
-              <a:lnSpc>
-                <a:spcPct val="100000"/>
-              </a:lnSpc>
-              <a:spcBef>
-                <a:spcPts val="0"/>
-              </a:spcBef>
-              <a:spcAft>
-                <a:spcPts val="0"/>
-              </a:spcAft>
-            </a:pPr>
-            <a:r>
-              <a:rPr sz="3600" b="0" i="0" spc="-108" lang="ko-KR" altLang="en-US">
-                <a:solidFill>
-                  <a:srgbClr val="121416"/>
-                </a:solidFill>
-                <a:latin typeface="Noto Sans KR W800"/>
-                <a:ea typeface="Noto Sans KR W800"/>
-                <a:cs typeface="Noto Sans KR W800"/>
-              </a:rPr>
-              <a:t>조절은 한 발로</a:t>
-            </a:r>
-          </a:p>
-        </p:txBody>
-      </p:sp>
-      <p:sp>
-        <p:nvSpPr>
-          <p:cNvPr id="16" name="08_body_13"/>
-          <p:cNvSpPr txBox="1"/>
-          <p:nvPr/>
-        </p:nvSpPr>
-        <p:spPr>
-          <a:xfrm>
-            <a:off x="1526977" y="9368629"/>
-            <a:ext cx="7232898" cy="544830"/>
-          </a:xfrm>
-          <a:prstGeom prst="rect">
-            <a:avLst/>
-          </a:prstGeom>
-          <a:noFill/>
-        </p:spPr>
-        <p:txBody>
-          <a:bodyPr wrap="none" lIns="0" rIns="0" tIns="0" bIns="0" anchor="t">
-            <a:noAutofit/>
-          </a:bodyPr>
-          <a:lstStyle/>
-          <a:p>
-            <a:pPr algn="ctr">
-              <a:lnSpc>
-                <a:spcPct val="100000"/>
-              </a:lnSpc>
-              <a:spcBef>
-                <a:spcPts val="0"/>
-              </a:spcBef>
-              <a:spcAft>
-                <a:spcPts val="0"/>
-              </a:spcAft>
-            </a:pPr>
-            <a:r>
-              <a:rPr sz="3300" b="0" i="0" spc="-66" lang="ko-KR" altLang="en-US">
-                <a:solidFill>
-                  <a:srgbClr val="121416"/>
-                </a:solidFill>
-                <a:latin typeface="Noto Sans KR W500"/>
-                <a:ea typeface="Noto Sans KR W500"/>
-                <a:cs typeface="Noto Sans KR W500"/>
-              </a:rPr>
-              <a:t>싱글 레그 데드리프트로 엉덩관절 연습</a:t>
-            </a:r>
-          </a:p>
-        </p:txBody>
-      </p:sp>
-      <p:sp>
-        <p:nvSpPr>
-          <p:cNvPr id="17" name="08_safety_14"/>
-          <p:cNvSpPr txBox="1"/>
-          <p:nvPr/>
-        </p:nvSpPr>
-        <p:spPr>
-          <a:xfrm>
-            <a:off x="1717477" y="10457420"/>
-            <a:ext cx="6852047" cy="445770"/>
-          </a:xfrm>
-          <a:prstGeom prst="rect">
-            <a:avLst/>
-          </a:prstGeom>
-          <a:noFill/>
-        </p:spPr>
-        <p:txBody>
-          <a:bodyPr wrap="none" lIns="0" rIns="0" tIns="0" bIns="0" anchor="t">
-            <a:noAutofit/>
-          </a:bodyPr>
-          <a:lstStyle/>
-          <a:p>
-            <a:pPr algn="ctr">
-              <a:lnSpc>
-                <a:spcPct val="100000"/>
-              </a:lnSpc>
-              <a:spcBef>
-                <a:spcPts val="0"/>
-              </a:spcBef>
-              <a:spcAft>
-                <a:spcPts val="0"/>
-              </a:spcAft>
-            </a:pPr>
-            <a:r>
-              <a:rPr sz="2700" b="0" i="0" spc="-54" lang="ko-KR" altLang="en-US">
-                <a:solidFill>
-                  <a:srgbClr val="121416"/>
-                </a:solidFill>
-                <a:latin typeface="Noto Sans KR W650"/>
-                <a:ea typeface="Noto Sans KR W650"/>
-                <a:cs typeface="Noto Sans KR W650"/>
-              </a:rPr>
-              <a:t>통증이 운동 중 커지거나 다음 날까지 남으면</a:t>
-            </a:r>
-          </a:p>
-        </p:txBody>
-      </p:sp>
-      <p:sp>
-        <p:nvSpPr>
-          <p:cNvPr id="18" name="08_safety_15"/>
-          <p:cNvSpPr txBox="1"/>
-          <p:nvPr/>
-        </p:nvSpPr>
-        <p:spPr>
-          <a:xfrm>
-            <a:off x="1247924" y="10944237"/>
-            <a:ext cx="7791152" cy="445770"/>
-          </a:xfrm>
-          <a:prstGeom prst="rect">
-            <a:avLst/>
-          </a:prstGeom>
-          <a:noFill/>
-        </p:spPr>
-        <p:txBody>
-          <a:bodyPr wrap="none" lIns="0" rIns="0" tIns="0" bIns="0" anchor="t">
-            <a:noAutofit/>
-          </a:bodyPr>
-          <a:lstStyle/>
-          <a:p>
-            <a:pPr algn="ctr">
-              <a:lnSpc>
-                <a:spcPct val="100000"/>
-              </a:lnSpc>
-              <a:spcBef>
-                <a:spcPts val="0"/>
-              </a:spcBef>
-              <a:spcAft>
-                <a:spcPts val="0"/>
-              </a:spcAft>
-            </a:pPr>
-            <a:r>
-              <a:rPr sz="2700" b="0" i="0" spc="-54" lang="ko-KR" altLang="en-US">
-                <a:solidFill>
-                  <a:srgbClr val="121416"/>
-                </a:solidFill>
-                <a:latin typeface="Noto Sans KR W650"/>
-                <a:ea typeface="Noto Sans KR W650"/>
-                <a:cs typeface="Noto Sans KR W650"/>
-              </a:rPr>
-              <a:t>범위와 무게를 줄이고 담당 트레이너와 조정하세요.</a:t>
-            </a:r>
-          </a:p>
-        </p:txBody>
-      </p:sp>
-      <p:sp>
-        <p:nvSpPr>
-          <p:cNvPr id="19" name="08_B01프레임"/>
+              <a:t>살짝 굽힌 채 유지</a:t>
+            </a:r>
+          </a:p>
+        </p:txBody>
+      </p:sp>
+      <p:sp>
+        <p:nvSpPr>
+          <p:cNvPr id="14" name="09_B01프레임"/>
           <p:cNvSpPr/>
           <p:nvPr/>
         </p:nvSpPr>
